--- a/docs/slides/推薦硬體配置清單.pptx
+++ b/docs/slides/推薦硬體配置清單.pptx
@@ -1393,7 +1393,7 @@
                 <a:ea typeface="Microsoft JhengHei" pitchFamily="34" charset="-122"/>
                 <a:cs typeface="Microsoft JhengHei" pitchFamily="34" charset="-120"/>
               </a:rPr>
-              <a:t>高級住宅・智慧管理平台　｜　從雲端到終端，一次配齊</a:t>
+              <a:t>高級住宅・智慧管理平台　｜　從雲端到終端，分階段配齊</a:t>
             </a:r>
             <a:endParaRPr lang="en-US" sz="1500" dirty="0"/>
           </a:p>
@@ -8799,7 +8799,7 @@
                   <a:srgbClr val="C9A35A"/>
                 </a:solidFill>
               </a:rPr>
-              <a:t>DEPLOYMENT TIERS</a:t>
+              <a:t>PHASED PROCUREMENT PLAN</a:t>
             </a:r>
             <a:endParaRPr lang="en-US" sz="1100" dirty="0"/>
           </a:p>
@@ -8838,7 +8838,7 @@
                 <a:ea typeface="Microsoft JhengHei" pitchFamily="34" charset="-122"/>
                 <a:cs typeface="Microsoft JhengHei" pitchFamily="34" charset="-120"/>
               </a:rPr>
-              <a:t>三級部署方案：依規模逐級擴充</a:t>
+              <a:t>分階段採購建議：什麼階段，買什麼</a:t>
             </a:r>
             <a:endParaRPr lang="en-US" sz="2600" dirty="0"/>
           </a:p>
@@ -8874,7 +8874,7 @@
                   <a:srgbClr val="9FB0CC"/>
                 </a:solidFill>
               </a:rPr>
-              <a:t>從接待中心示範，到單棟上線，再到多棟大型建案</a:t>
+              <a:t>與《系統方案規劃書》P0–P3 對齊 —— 硬體隨建案工程分批就位,避免一次性重投資</a:t>
             </a:r>
             <a:endParaRPr lang="en-US" sz="1250" dirty="0"/>
           </a:p>
@@ -8928,7 +8928,7 @@
                   <a:srgbClr val="E6CF9A"/>
                 </a:solidFill>
               </a:rPr>
-              <a:t>三種硬體規模</a:t>
+              <a:t>四階段分批採購</a:t>
             </a:r>
             <a:endParaRPr lang="en-US" sz="1150" dirty="0"/>
           </a:p>
@@ -8936,37 +8936,798 @@
       </p:sp>
       <p:sp>
         <p:nvSpPr>
-          <p:cNvPr id="6" name="Shape 4"/>
-          <p:cNvSpPr/>
-          <p:nvPr/>
-        </p:nvSpPr>
-        <p:spPr>
-          <a:xfrm>
-            <a:off x="566928" y="1700784"/>
-            <a:ext cx="3566160" cy="4297680"/>
+          <p:cNvPr id="6" name="Text 4"/>
+          <p:cNvSpPr/>
+          <p:nvPr/>
+        </p:nvSpPr>
+        <p:spPr>
+          <a:xfrm>
+            <a:off x="5486400" y="1170432"/>
+            <a:ext cx="6153912" cy="274320"/>
+          </a:xfrm>
+          <a:prstGeom prst="rect">
+            <a:avLst/>
+          </a:prstGeom>
+          <a:noFill/>
+          <a:ln/>
+        </p:spPr>
+        <p:txBody>
+          <a:bodyPr wrap="square" lIns="0" tIns="0" rIns="0" bIns="0" rtlCol="0" anchor="ctr"/>
+          <a:lstStyle/>
+          <a:p>
+            <a:pPr algn="r" indent="0" marL="0">
+              <a:buNone/>
+            </a:pPr>
+            <a:r>
+              <a:rPr lang="en-US" sz="1050" dirty="0">
+                <a:solidFill>
+                  <a:srgbClr val="69D6A8"/>
+                </a:solidFill>
+              </a:rPr>
+              <a:t>● </a:t>
+            </a:r>
+            <a:pPr algn="r" indent="0" marL="0">
+              <a:buNone/>
+            </a:pPr>
+            <a:r>
+              <a:rPr lang="en-US" sz="1050" dirty="0">
+                <a:solidFill>
+                  <a:srgbClr val="CDD8EC"/>
+                </a:solidFill>
+              </a:rPr>
+              <a:t>已整合上線　</a:t>
+            </a:r>
+            <a:pPr algn="r" indent="0" marL="0">
+              <a:buNone/>
+            </a:pPr>
+            <a:r>
+              <a:rPr lang="en-US" sz="1050" dirty="0">
+                <a:solidFill>
+                  <a:srgbClr val="C9A35A"/>
+                </a:solidFill>
+              </a:rPr>
+              <a:t>● </a:t>
+            </a:r>
+            <a:pPr algn="r" indent="0" marL="0">
+              <a:buNone/>
+            </a:pPr>
+            <a:r>
+              <a:rPr lang="en-US" sz="1050" dirty="0">
+                <a:solidFill>
+                  <a:srgbClr val="CDD8EC"/>
+                </a:solidFill>
+              </a:rPr>
+              <a:t>建議必備　</a:t>
+            </a:r>
+            <a:pPr algn="r" indent="0" marL="0">
+              <a:buNone/>
+            </a:pPr>
+            <a:r>
+              <a:rPr lang="en-US" sz="1050" dirty="0">
+                <a:solidFill>
+                  <a:srgbClr val="6FB1FF"/>
+                </a:solidFill>
+              </a:rPr>
+              <a:t>○ </a:t>
+            </a:r>
+            <a:pPr algn="r" indent="0" marL="0">
+              <a:buNone/>
+            </a:pPr>
+            <a:r>
+              <a:rPr lang="en-US" sz="1050" dirty="0">
+                <a:solidFill>
+                  <a:srgbClr val="CDD8EC"/>
+                </a:solidFill>
+              </a:rPr>
+              <a:t>選配・待接</a:t>
+            </a:r>
+            <a:endParaRPr lang="en-US" sz="1050" dirty="0"/>
+          </a:p>
+        </p:txBody>
+      </p:sp>
+      <p:sp>
+        <p:nvSpPr>
+          <p:cNvPr id="7" name="Shape 5"/>
+          <p:cNvSpPr/>
+          <p:nvPr/>
+        </p:nvSpPr>
+        <p:spPr>
+          <a:xfrm>
+            <a:off x="475488" y="1572768"/>
+            <a:ext cx="2743200" cy="4224528"/>
           </a:xfrm>
           <a:prstGeom prst="roundRect">
             <a:avLst>
-              <a:gd name="adj" fmla="val 3077"/>
+              <a:gd name="adj" fmla="val 3667"/>
+            </a:avLst>
+          </a:prstGeom>
+          <a:solidFill>
+            <a:srgbClr val="13241D">
+              <a:alpha val="90000"/>
+            </a:srgbClr>
+          </a:solidFill>
+          <a:ln w="12700">
+            <a:solidFill>
+              <a:srgbClr val="69D6A8">
+                <a:alpha val="60000"/>
+              </a:srgbClr>
+            </a:solidFill>
+            <a:prstDash val="solid"/>
+          </a:ln>
+          <a:effectLst>
+            <a:outerShdw sx="100000" sy="100000" kx="0" ky="0" algn="bl" rotWithShape="0" blurRad="101600" dist="38100" dir="5400000">
+              <a:srgbClr val="000000">
+                <a:alpha val="30000"/>
+              </a:srgbClr>
+            </a:outerShdw>
+          </a:effectLst>
+        </p:spPr>
+      </p:sp>
+      <p:sp>
+        <p:nvSpPr>
+          <p:cNvPr id="8" name="Shape 6"/>
+          <p:cNvSpPr/>
+          <p:nvPr/>
+        </p:nvSpPr>
+        <p:spPr>
+          <a:xfrm>
+            <a:off x="676656" y="1719072"/>
+            <a:ext cx="402336" cy="402336"/>
+          </a:xfrm>
+          <a:prstGeom prst="ellipse">
+            <a:avLst/>
+          </a:prstGeom>
+          <a:solidFill>
+            <a:srgbClr val="69D6A8"/>
+          </a:solidFill>
+          <a:ln w="15240">
+            <a:solidFill>
+              <a:srgbClr val="0B1220"/>
+            </a:solidFill>
+            <a:prstDash val="solid"/>
+          </a:ln>
+        </p:spPr>
+      </p:sp>
+      <p:sp>
+        <p:nvSpPr>
+          <p:cNvPr id="9" name="Text 7"/>
+          <p:cNvSpPr/>
+          <p:nvPr/>
+        </p:nvSpPr>
+        <p:spPr>
+          <a:xfrm>
+            <a:off x="676656" y="1719072"/>
+            <a:ext cx="402336" cy="402336"/>
+          </a:xfrm>
+          <a:prstGeom prst="rect">
+            <a:avLst/>
+          </a:prstGeom>
+          <a:noFill/>
+          <a:ln/>
+        </p:spPr>
+        <p:txBody>
+          <a:bodyPr wrap="square" lIns="0" tIns="0" rIns="0" bIns="0" rtlCol="0" anchor="ctr"/>
+          <a:lstStyle/>
+          <a:p>
+            <a:pPr algn="ctr" indent="0" marL="0">
+              <a:buNone/>
+            </a:pPr>
+            <a:r>
+              <a:rPr lang="en-US" sz="1150" b="1" dirty="0">
+                <a:solidFill>
+                  <a:srgbClr val="0B1220"/>
+                </a:solidFill>
+              </a:rPr>
+              <a:t>P0</a:t>
+            </a:r>
+            <a:endParaRPr lang="en-US" sz="1150" dirty="0"/>
+          </a:p>
+        </p:txBody>
+      </p:sp>
+      <p:sp>
+        <p:nvSpPr>
+          <p:cNvPr id="10" name="Text 8"/>
+          <p:cNvSpPr/>
+          <p:nvPr/>
+        </p:nvSpPr>
+        <p:spPr>
+          <a:xfrm>
+            <a:off x="1170432" y="1682496"/>
+            <a:ext cx="1920240" cy="493776"/>
+          </a:xfrm>
+          <a:prstGeom prst="rect">
+            <a:avLst/>
+          </a:prstGeom>
+          <a:noFill/>
+          <a:ln/>
+        </p:spPr>
+        <p:txBody>
+          <a:bodyPr wrap="square" lIns="0" tIns="0" rIns="0" bIns="0" rtlCol="0" anchor="ctr"/>
+          <a:lstStyle/>
+          <a:p>
+            <a:pPr indent="0" marL="0">
+              <a:lnSpc>
+                <a:spcPct val="100000"/>
+              </a:lnSpc>
+              <a:buNone/>
+            </a:pPr>
+            <a:r>
+              <a:rPr lang="en-US" sz="1250" b="1" dirty="0">
+                <a:solidFill>
+                  <a:srgbClr val="F6F3EC"/>
+                </a:solidFill>
+                <a:latin typeface="Microsoft JhengHei" pitchFamily="34" charset="0"/>
+                <a:ea typeface="Microsoft JhengHei" pitchFamily="34" charset="-122"/>
+                <a:cs typeface="Microsoft JhengHei" pitchFamily="34" charset="-120"/>
+              </a:rPr>
+              <a:t>平台開發・客製
+</a:t>
+            </a:r>
+            <a:pPr indent="0" marL="0">
+              <a:lnSpc>
+                <a:spcPct val="100000"/>
+              </a:lnSpc>
+              <a:buNone/>
+            </a:pPr>
+            <a:r>
+              <a:rPr lang="en-US" sz="900" b="1" spc="100" kern="0" dirty="0">
+                <a:solidFill>
+                  <a:srgbClr val="69D6A8"/>
+                </a:solidFill>
+                <a:latin typeface="Microsoft JhengHei" pitchFamily="34" charset="0"/>
+                <a:ea typeface="Microsoft JhengHei" pitchFamily="34" charset="-122"/>
+                <a:cs typeface="Microsoft JhengHei" pitchFamily="34" charset="-120"/>
+              </a:rPr>
+              <a:t>預售期・即刻啟動</a:t>
+            </a:r>
+            <a:endParaRPr lang="en-US" sz="1250" dirty="0"/>
+          </a:p>
+        </p:txBody>
+      </p:sp>
+      <p:sp>
+        <p:nvSpPr>
+          <p:cNvPr id="11" name="Shape 9"/>
+          <p:cNvSpPr/>
+          <p:nvPr/>
+        </p:nvSpPr>
+        <p:spPr>
+          <a:xfrm>
+            <a:off x="658368" y="2267712"/>
+            <a:ext cx="2377440" cy="0"/>
+          </a:xfrm>
+          <a:prstGeom prst="line">
+            <a:avLst/>
+          </a:prstGeom>
+          <a:noFill/>
+          <a:ln w="7620">
+            <a:solidFill>
+              <a:srgbClr val="69D6A8">
+                <a:alpha val="60000"/>
+              </a:srgbClr>
+            </a:solidFill>
+            <a:prstDash val="dash"/>
+          </a:ln>
+        </p:spPr>
+      </p:sp>
+      <p:sp>
+        <p:nvSpPr>
+          <p:cNvPr id="12" name="Text 10"/>
+          <p:cNvSpPr/>
+          <p:nvPr/>
+        </p:nvSpPr>
+        <p:spPr>
+          <a:xfrm>
+            <a:off x="658368" y="2377440"/>
+            <a:ext cx="2414016" cy="219456"/>
+          </a:xfrm>
+          <a:prstGeom prst="rect">
+            <a:avLst/>
+          </a:prstGeom>
+          <a:noFill/>
+          <a:ln/>
+        </p:spPr>
+        <p:txBody>
+          <a:bodyPr wrap="square" lIns="0" tIns="0" rIns="0" bIns="0" rtlCol="0" anchor="ctr"/>
+          <a:lstStyle/>
+          <a:p>
+            <a:pPr indent="0" marL="0">
+              <a:buNone/>
+            </a:pPr>
+            <a:r>
+              <a:rPr lang="en-US" sz="1000" dirty="0">
+                <a:solidFill>
+                  <a:srgbClr val="C9A35A"/>
+                </a:solidFill>
+                <a:latin typeface="Microsoft JhengHei" pitchFamily="34" charset="0"/>
+                <a:ea typeface="Microsoft JhengHei" pitchFamily="34" charset="-122"/>
+                <a:cs typeface="Microsoft JhengHei" pitchFamily="34" charset="-120"/>
+              </a:rPr>
+              <a:t>● </a:t>
+            </a:r>
+            <a:pPr indent="0" marL="0">
+              <a:buNone/>
+            </a:pPr>
+            <a:r>
+              <a:rPr lang="en-US" sz="1030" b="1" dirty="0">
+                <a:solidFill>
+                  <a:srgbClr val="F6F3EC"/>
+                </a:solidFill>
+                <a:latin typeface="Microsoft JhengHei" pitchFamily="34" charset="0"/>
+                <a:ea typeface="Microsoft JhengHei" pitchFamily="34" charset="-122"/>
+                <a:cs typeface="Microsoft JhengHei" pitchFamily="34" charset="-120"/>
+              </a:rPr>
+              <a:t>櫃檯平板 ×1</a:t>
+            </a:r>
+            <a:endParaRPr lang="en-US" sz="1000" dirty="0"/>
+          </a:p>
+        </p:txBody>
+      </p:sp>
+      <p:sp>
+        <p:nvSpPr>
+          <p:cNvPr id="13" name="Text 11"/>
+          <p:cNvSpPr/>
+          <p:nvPr/>
+        </p:nvSpPr>
+        <p:spPr>
+          <a:xfrm>
+            <a:off x="859536" y="2596896"/>
+            <a:ext cx="2212848" cy="493776"/>
+          </a:xfrm>
+          <a:prstGeom prst="rect">
+            <a:avLst/>
+          </a:prstGeom>
+          <a:noFill/>
+          <a:ln/>
+        </p:spPr>
+        <p:txBody>
+          <a:bodyPr wrap="square" lIns="0" tIns="0" rIns="0" bIns="0" rtlCol="0" anchor="t"/>
+          <a:lstStyle/>
+          <a:p>
+            <a:pPr indent="0" marL="0">
+              <a:lnSpc>
+                <a:spcPct val="98000"/>
+              </a:lnSpc>
+              <a:buNone/>
+            </a:pPr>
+            <a:r>
+              <a:rPr lang="en-US" sz="820" dirty="0">
+                <a:solidFill>
+                  <a:srgbClr val="CDD8EC"/>
+                </a:solidFill>
+                <a:latin typeface="Microsoft JhengHei" pitchFamily="34" charset="0"/>
+                <a:ea typeface="Microsoft JhengHei" pitchFamily="34" charset="-122"/>
+                <a:cs typeface="Microsoft JhengHei" pitchFamily="34" charset="-120"/>
+              </a:rPr>
+              <a:t>樣品屋語音預約→派單實演</a:t>
+            </a:r>
+            <a:endParaRPr lang="en-US" sz="820" dirty="0"/>
+          </a:p>
+        </p:txBody>
+      </p:sp>
+      <p:sp>
+        <p:nvSpPr>
+          <p:cNvPr id="14" name="Text 12"/>
+          <p:cNvSpPr/>
+          <p:nvPr/>
+        </p:nvSpPr>
+        <p:spPr>
+          <a:xfrm>
+            <a:off x="658368" y="3108960"/>
+            <a:ext cx="2414016" cy="219456"/>
+          </a:xfrm>
+          <a:prstGeom prst="rect">
+            <a:avLst/>
+          </a:prstGeom>
+          <a:noFill/>
+          <a:ln/>
+        </p:spPr>
+        <p:txBody>
+          <a:bodyPr wrap="square" lIns="0" tIns="0" rIns="0" bIns="0" rtlCol="0" anchor="ctr"/>
+          <a:lstStyle/>
+          <a:p>
+            <a:pPr indent="0" marL="0">
+              <a:buNone/>
+            </a:pPr>
+            <a:r>
+              <a:rPr lang="en-US" sz="1000" dirty="0">
+                <a:solidFill>
+                  <a:srgbClr val="C9A35A"/>
+                </a:solidFill>
+                <a:latin typeface="Microsoft JhengHei" pitchFamily="34" charset="0"/>
+                <a:ea typeface="Microsoft JhengHei" pitchFamily="34" charset="-122"/>
+                <a:cs typeface="Microsoft JhengHei" pitchFamily="34" charset="-120"/>
+              </a:rPr>
+              <a:t>● </a:t>
+            </a:r>
+            <a:pPr indent="0" marL="0">
+              <a:buNone/>
+            </a:pPr>
+            <a:r>
+              <a:rPr lang="en-US" sz="1030" b="1" dirty="0">
+                <a:solidFill>
+                  <a:srgbClr val="F6F3EC"/>
+                </a:solidFill>
+                <a:latin typeface="Microsoft JhengHei" pitchFamily="34" charset="0"/>
+                <a:ea typeface="Microsoft JhengHei" pitchFamily="34" charset="-122"/>
+                <a:cs typeface="Microsoft JhengHei" pitchFamily="34" charset="-120"/>
+              </a:rPr>
+              <a:t>Nest 音箱 ×1</a:t>
+            </a:r>
+            <a:endParaRPr lang="en-US" sz="1000" dirty="0"/>
+          </a:p>
+        </p:txBody>
+      </p:sp>
+      <p:sp>
+        <p:nvSpPr>
+          <p:cNvPr id="15" name="Text 13"/>
+          <p:cNvSpPr/>
+          <p:nvPr/>
+        </p:nvSpPr>
+        <p:spPr>
+          <a:xfrm>
+            <a:off x="859536" y="3328416"/>
+            <a:ext cx="2212848" cy="493776"/>
+          </a:xfrm>
+          <a:prstGeom prst="rect">
+            <a:avLst/>
+          </a:prstGeom>
+          <a:noFill/>
+          <a:ln/>
+        </p:spPr>
+        <p:txBody>
+          <a:bodyPr wrap="square" lIns="0" tIns="0" rIns="0" bIns="0" rtlCol="0" anchor="t"/>
+          <a:lstStyle/>
+          <a:p>
+            <a:pPr indent="0" marL="0">
+              <a:lnSpc>
+                <a:spcPct val="98000"/>
+              </a:lnSpc>
+              <a:buNone/>
+            </a:pPr>
+            <a:r>
+              <a:rPr lang="en-US" sz="820" dirty="0">
+                <a:solidFill>
+                  <a:srgbClr val="CDD8EC"/>
+                </a:solidFill>
+                <a:latin typeface="Microsoft JhengHei" pitchFamily="34" charset="0"/>
+                <a:ea typeface="Microsoft JhengHei" pitchFamily="34" charset="-122"/>
+                <a:cs typeface="Microsoft JhengHei" pitchFamily="34" charset="-120"/>
+              </a:rPr>
+              <a:t>語音裝置控制展示</a:t>
+            </a:r>
+            <a:endParaRPr lang="en-US" sz="820" dirty="0"/>
+          </a:p>
+        </p:txBody>
+      </p:sp>
+      <p:sp>
+        <p:nvSpPr>
+          <p:cNvPr id="16" name="Text 14"/>
+          <p:cNvSpPr/>
+          <p:nvPr/>
+        </p:nvSpPr>
+        <p:spPr>
+          <a:xfrm>
+            <a:off x="658368" y="3840480"/>
+            <a:ext cx="2414016" cy="219456"/>
+          </a:xfrm>
+          <a:prstGeom prst="rect">
+            <a:avLst/>
+          </a:prstGeom>
+          <a:noFill/>
+          <a:ln/>
+        </p:spPr>
+        <p:txBody>
+          <a:bodyPr wrap="square" lIns="0" tIns="0" rIns="0" bIns="0" rtlCol="0" anchor="ctr"/>
+          <a:lstStyle/>
+          <a:p>
+            <a:pPr indent="0" marL="0">
+              <a:buNone/>
+            </a:pPr>
+            <a:r>
+              <a:rPr lang="en-US" sz="1000" dirty="0">
+                <a:solidFill>
+                  <a:srgbClr val="6FB1FF"/>
+                </a:solidFill>
+                <a:latin typeface="Microsoft JhengHei" pitchFamily="34" charset="0"/>
+                <a:ea typeface="Microsoft JhengHei" pitchFamily="34" charset="-122"/>
+                <a:cs typeface="Microsoft JhengHei" pitchFamily="34" charset="-120"/>
+              </a:rPr>
+              <a:t>○ </a:t>
+            </a:r>
+            <a:pPr indent="0" marL="0">
+              <a:buNone/>
+            </a:pPr>
+            <a:r>
+              <a:rPr lang="en-US" sz="1030" b="1" dirty="0">
+                <a:solidFill>
+                  <a:srgbClr val="F6F3EC"/>
+                </a:solidFill>
+                <a:latin typeface="Microsoft JhengHei" pitchFamily="34" charset="0"/>
+                <a:ea typeface="Microsoft JhengHei" pitchFamily="34" charset="-122"/>
+                <a:cs typeface="Microsoft JhengHei" pitchFamily="34" charset="-120"/>
+              </a:rPr>
+              <a:t>示範閘道＋情境設備</a:t>
+            </a:r>
+            <a:endParaRPr lang="en-US" sz="1000" dirty="0"/>
+          </a:p>
+        </p:txBody>
+      </p:sp>
+      <p:sp>
+        <p:nvSpPr>
+          <p:cNvPr id="17" name="Text 15"/>
+          <p:cNvSpPr/>
+          <p:nvPr/>
+        </p:nvSpPr>
+        <p:spPr>
+          <a:xfrm>
+            <a:off x="859536" y="4059936"/>
+            <a:ext cx="2212848" cy="493776"/>
+          </a:xfrm>
+          <a:prstGeom prst="rect">
+            <a:avLst/>
+          </a:prstGeom>
+          <a:noFill/>
+          <a:ln/>
+        </p:spPr>
+        <p:txBody>
+          <a:bodyPr wrap="square" lIns="0" tIns="0" rIns="0" bIns="0" rtlCol="0" anchor="t"/>
+          <a:lstStyle/>
+          <a:p>
+            <a:pPr indent="0" marL="0">
+              <a:lnSpc>
+                <a:spcPct val="98000"/>
+              </a:lnSpc>
+              <a:buNone/>
+            </a:pPr>
+            <a:r>
+              <a:rPr lang="en-US" sz="820" dirty="0">
+                <a:solidFill>
+                  <a:srgbClr val="CDD8EC"/>
+                </a:solidFill>
+                <a:latin typeface="Microsoft JhengHei" pitchFamily="34" charset="0"/>
+                <a:ea typeface="Microsoft JhengHei" pitchFamily="34" charset="-122"/>
+                <a:cs typeface="Microsoft JhengHei" pitchFamily="34" charset="-120"/>
+              </a:rPr>
+              <a:t>少量燈光/空調(或乾跑展示)</a:t>
+            </a:r>
+            <a:endParaRPr lang="en-US" sz="820" dirty="0"/>
+          </a:p>
+        </p:txBody>
+      </p:sp>
+      <p:sp>
+        <p:nvSpPr>
+          <p:cNvPr id="18" name="Text 16"/>
+          <p:cNvSpPr/>
+          <p:nvPr/>
+        </p:nvSpPr>
+        <p:spPr>
+          <a:xfrm>
+            <a:off x="658368" y="4572000"/>
+            <a:ext cx="2414016" cy="219456"/>
+          </a:xfrm>
+          <a:prstGeom prst="rect">
+            <a:avLst/>
+          </a:prstGeom>
+          <a:noFill/>
+          <a:ln/>
+        </p:spPr>
+        <p:txBody>
+          <a:bodyPr wrap="square" lIns="0" tIns="0" rIns="0" bIns="0" rtlCol="0" anchor="ctr"/>
+          <a:lstStyle/>
+          <a:p>
+            <a:pPr indent="0" marL="0">
+              <a:buNone/>
+            </a:pPr>
+            <a:r>
+              <a:rPr lang="en-US" sz="1000" dirty="0">
+                <a:solidFill>
+                  <a:srgbClr val="69D6A8"/>
+                </a:solidFill>
+                <a:latin typeface="Microsoft JhengHei" pitchFamily="34" charset="0"/>
+                <a:ea typeface="Microsoft JhengHei" pitchFamily="34" charset="-122"/>
+                <a:cs typeface="Microsoft JhengHei" pitchFamily="34" charset="-120"/>
+              </a:rPr>
+              <a:t>● </a:t>
+            </a:r>
+            <a:pPr indent="0" marL="0">
+              <a:buNone/>
+            </a:pPr>
+            <a:r>
+              <a:rPr lang="en-US" sz="1030" b="1" dirty="0">
+                <a:solidFill>
+                  <a:srgbClr val="F6F3EC"/>
+                </a:solidFill>
+                <a:latin typeface="Microsoft JhengHei" pitchFamily="34" charset="0"/>
+                <a:ea typeface="Microsoft JhengHei" pitchFamily="34" charset="-122"/>
+                <a:cs typeface="Microsoft JhengHei" pitchFamily="34" charset="-120"/>
+              </a:rPr>
+              <a:t>雲端(免費層)</a:t>
+            </a:r>
+            <a:endParaRPr lang="en-US" sz="1000" dirty="0"/>
+          </a:p>
+        </p:txBody>
+      </p:sp>
+      <p:sp>
+        <p:nvSpPr>
+          <p:cNvPr id="19" name="Text 17"/>
+          <p:cNvSpPr/>
+          <p:nvPr/>
+        </p:nvSpPr>
+        <p:spPr>
+          <a:xfrm>
+            <a:off x="859536" y="4791456"/>
+            <a:ext cx="2212848" cy="493776"/>
+          </a:xfrm>
+          <a:prstGeom prst="rect">
+            <a:avLst/>
+          </a:prstGeom>
+          <a:noFill/>
+          <a:ln/>
+        </p:spPr>
+        <p:txBody>
+          <a:bodyPr wrap="square" lIns="0" tIns="0" rIns="0" bIns="0" rtlCol="0" anchor="t"/>
+          <a:lstStyle/>
+          <a:p>
+            <a:pPr indent="0" marL="0">
+              <a:lnSpc>
+                <a:spcPct val="98000"/>
+              </a:lnSpc>
+              <a:buNone/>
+            </a:pPr>
+            <a:r>
+              <a:rPr lang="en-US" sz="820" dirty="0">
+                <a:solidFill>
+                  <a:srgbClr val="CDD8EC"/>
+                </a:solidFill>
+                <a:latin typeface="Microsoft JhengHei" pitchFamily="34" charset="0"/>
+                <a:ea typeface="Microsoft JhengHei" pitchFamily="34" charset="-122"/>
+                <a:cs typeface="Microsoft JhengHei" pitchFamily="34" charset="-120"/>
+              </a:rPr>
+              <a:t>Render + Vercel + LINE OA</a:t>
+            </a:r>
+            <a:endParaRPr lang="en-US" sz="820" dirty="0"/>
+          </a:p>
+        </p:txBody>
+      </p:sp>
+      <p:sp>
+        <p:nvSpPr>
+          <p:cNvPr id="20" name="Shape 18"/>
+          <p:cNvSpPr/>
+          <p:nvPr/>
+        </p:nvSpPr>
+        <p:spPr>
+          <a:xfrm>
+            <a:off x="621792" y="5340096"/>
+            <a:ext cx="2450592" cy="329184"/>
+          </a:xfrm>
+          <a:prstGeom prst="roundRect">
+            <a:avLst>
+              <a:gd name="adj" fmla="val 19444"/>
+            </a:avLst>
+          </a:prstGeom>
+          <a:solidFill>
+            <a:srgbClr val="0E1A30">
+              <a:alpha val="90000"/>
+            </a:srgbClr>
+          </a:solidFill>
+          <a:ln w="7620">
+            <a:solidFill>
+              <a:srgbClr val="69D6A8">
+                <a:alpha val="55000"/>
+              </a:srgbClr>
+            </a:solidFill>
+            <a:prstDash val="solid"/>
+          </a:ln>
+        </p:spPr>
+      </p:sp>
+      <p:sp>
+        <p:nvSpPr>
+          <p:cNvPr id="21" name="Text 19"/>
+          <p:cNvSpPr/>
+          <p:nvPr/>
+        </p:nvSpPr>
+        <p:spPr>
+          <a:xfrm>
+            <a:off x="621792" y="5340096"/>
+            <a:ext cx="2450592" cy="329184"/>
+          </a:xfrm>
+          <a:prstGeom prst="rect">
+            <a:avLst/>
+          </a:prstGeom>
+          <a:noFill/>
+          <a:ln/>
+        </p:spPr>
+        <p:txBody>
+          <a:bodyPr wrap="square" lIns="0" tIns="0" rIns="0" bIns="0" rtlCol="0" anchor="ctr"/>
+          <a:lstStyle/>
+          <a:p>
+            <a:pPr algn="ctr" indent="0" marL="0">
+              <a:buNone/>
+            </a:pPr>
+            <a:r>
+              <a:rPr lang="en-US" sz="900" b="1" dirty="0">
+                <a:solidFill>
+                  <a:srgbClr val="E6CF9A"/>
+                </a:solidFill>
+                <a:latin typeface="Microsoft JhengHei" pitchFamily="34" charset="0"/>
+                <a:ea typeface="Microsoft JhengHei" pitchFamily="34" charset="-122"/>
+                <a:cs typeface="Microsoft JhengHei" pitchFamily="34" charset="-120"/>
+              </a:rPr>
+              <a:t>幾乎零硬體投入</a:t>
+            </a:r>
+            <a:endParaRPr lang="en-US" sz="900" dirty="0"/>
+          </a:p>
+        </p:txBody>
+      </p:sp>
+      <p:sp>
+        <p:nvSpPr>
+          <p:cNvPr id="22" name="Text 20"/>
+          <p:cNvSpPr/>
+          <p:nvPr/>
+        </p:nvSpPr>
+        <p:spPr>
+          <a:xfrm>
+            <a:off x="3191256" y="1719072"/>
+            <a:ext cx="164592" cy="402336"/>
+          </a:xfrm>
+          <a:prstGeom prst="rect">
+            <a:avLst/>
+          </a:prstGeom>
+          <a:noFill/>
+          <a:ln/>
+        </p:spPr>
+        <p:txBody>
+          <a:bodyPr wrap="square" lIns="0" tIns="0" rIns="0" bIns="0" rtlCol="0" anchor="ctr"/>
+          <a:lstStyle/>
+          <a:p>
+            <a:pPr algn="ctr" indent="0" marL="0">
+              <a:buNone/>
+            </a:pPr>
+            <a:r>
+              <a:rPr lang="en-US" sz="1300" b="1" dirty="0">
+                <a:solidFill>
+                  <a:srgbClr val="C9A35A"/>
+                </a:solidFill>
+              </a:rPr>
+              <a:t>→</a:t>
+            </a:r>
+            <a:endParaRPr lang="en-US" sz="1300" dirty="0"/>
+          </a:p>
+        </p:txBody>
+      </p:sp>
+      <p:sp>
+        <p:nvSpPr>
+          <p:cNvPr id="23" name="Shape 21"/>
+          <p:cNvSpPr/>
+          <p:nvPr/>
+        </p:nvSpPr>
+        <p:spPr>
+          <a:xfrm>
+            <a:off x="3328416" y="1572768"/>
+            <a:ext cx="2743200" cy="4224528"/>
+          </a:xfrm>
+          <a:prstGeom prst="roundRect">
+            <a:avLst>
+              <a:gd name="adj" fmla="val 3667"/>
             </a:avLst>
           </a:prstGeom>
           <a:solidFill>
             <a:srgbClr val="12203A">
-              <a:alpha val="82000"/>
+              <a:alpha val="80000"/>
             </a:srgbClr>
           </a:solidFill>
           <a:ln w="9525">
             <a:solidFill>
               <a:srgbClr val="C9A35A">
-                <a:alpha val="45000"/>
+                <a:alpha val="42000"/>
               </a:srgbClr>
             </a:solidFill>
             <a:prstDash val="solid"/>
           </a:ln>
           <a:effectLst>
-            <a:outerShdw sx="100000" sy="100000" kx="0" ky="0" algn="bl" rotWithShape="0" blurRad="114300" dist="38100" dir="5400000">
+            <a:outerShdw sx="100000" sy="100000" kx="0" ky="0" algn="bl" rotWithShape="0" blurRad="101600" dist="38100" dir="5400000">
               <a:srgbClr val="000000">
-                <a:alpha val="32000"/>
+                <a:alpha val="30000"/>
               </a:srgbClr>
             </a:outerShdw>
           </a:effectLst>
@@ -8974,65 +9735,39 @@
       </p:sp>
       <p:sp>
         <p:nvSpPr>
-          <p:cNvPr id="7" name="Shape 5"/>
-          <p:cNvSpPr/>
-          <p:nvPr/>
-        </p:nvSpPr>
-        <p:spPr>
-          <a:xfrm>
-            <a:off x="1947672" y="2011680"/>
-            <a:ext cx="804672" cy="804672"/>
+          <p:cNvPr id="24" name="Shape 22"/>
+          <p:cNvSpPr/>
+          <p:nvPr/>
+        </p:nvSpPr>
+        <p:spPr>
+          <a:xfrm>
+            <a:off x="3529584" y="1719072"/>
+            <a:ext cx="402336" cy="402336"/>
           </a:xfrm>
           <a:prstGeom prst="ellipse">
             <a:avLst/>
           </a:prstGeom>
           <a:solidFill>
-            <a:srgbClr val="0F1C33"/>
+            <a:srgbClr val="C9A35A"/>
           </a:solidFill>
-          <a:ln w="12700">
+          <a:ln w="15240">
             <a:solidFill>
-              <a:srgbClr val="6FB1FF">
-                <a:alpha val="75000"/>
-              </a:srgbClr>
+              <a:srgbClr val="0B1220"/>
             </a:solidFill>
             <a:prstDash val="solid"/>
           </a:ln>
         </p:spPr>
       </p:sp>
-      <p:pic>
-        <p:nvPicPr>
-          <p:cNvPr id="8" name="Image 0" descr="preencoded.png">    </p:cNvPr>
-          <p:cNvPicPr>
-            <a:picLocks noChangeAspect="1"/>
-          </p:cNvPicPr>
-          <p:nvPr/>
-        </p:nvPicPr>
-        <p:blipFill>
-          <a:blip r:embed="rId2"/>
-          <a:stretch>
-            <a:fillRect/>
-          </a:stretch>
-        </p:blipFill>
-        <p:spPr>
-          <a:xfrm>
-            <a:off x="2130552" y="2194560"/>
-            <a:ext cx="438912" cy="438912"/>
-          </a:xfrm>
-          <a:prstGeom prst="rect">
-            <a:avLst/>
-          </a:prstGeom>
-        </p:spPr>
-      </p:pic>
-      <p:sp>
-        <p:nvSpPr>
-          <p:cNvPr id="9" name="Text 6"/>
-          <p:cNvSpPr/>
-          <p:nvPr/>
-        </p:nvSpPr>
-        <p:spPr>
-          <a:xfrm>
-            <a:off x="566928" y="2889504"/>
-            <a:ext cx="3566160" cy="420624"/>
+      <p:sp>
+        <p:nvSpPr>
+          <p:cNvPr id="25" name="Text 23"/>
+          <p:cNvSpPr/>
+          <p:nvPr/>
+        </p:nvSpPr>
+        <p:spPr>
+          <a:xfrm>
+            <a:off x="3529584" y="1719072"/>
+            <a:ext cx="402336" cy="402336"/>
           </a:xfrm>
           <a:prstGeom prst="rect">
             <a:avLst/>
@@ -9048,7 +9783,46 @@
               <a:buNone/>
             </a:pPr>
             <a:r>
-              <a:rPr lang="en-US" sz="2400" b="1" dirty="0">
+              <a:rPr lang="en-US" sz="1150" b="1" dirty="0">
+                <a:solidFill>
+                  <a:srgbClr val="0B1220"/>
+                </a:solidFill>
+              </a:rPr>
+              <a:t>P1</a:t>
+            </a:r>
+            <a:endParaRPr lang="en-US" sz="1150" dirty="0"/>
+          </a:p>
+        </p:txBody>
+      </p:sp>
+      <p:sp>
+        <p:nvSpPr>
+          <p:cNvPr id="26" name="Text 24"/>
+          <p:cNvSpPr/>
+          <p:nvPr/>
+        </p:nvSpPr>
+        <p:spPr>
+          <a:xfrm>
+            <a:off x="4023360" y="1682496"/>
+            <a:ext cx="1920240" cy="493776"/>
+          </a:xfrm>
+          <a:prstGeom prst="rect">
+            <a:avLst/>
+          </a:prstGeom>
+          <a:noFill/>
+          <a:ln/>
+        </p:spPr>
+        <p:txBody>
+          <a:bodyPr wrap="square" lIns="0" tIns="0" rIns="0" bIns="0" rtlCol="0" anchor="ctr"/>
+          <a:lstStyle/>
+          <a:p>
+            <a:pPr indent="0" marL="0">
+              <a:lnSpc>
+                <a:spcPct val="100000"/>
+              </a:lnSpc>
+              <a:buNone/>
+            </a:pPr>
+            <a:r>
+              <a:rPr lang="en-US" sz="1250" b="1" dirty="0">
                 <a:solidFill>
                   <a:srgbClr val="F6F3EC"/>
                 </a:solidFill>
@@ -9056,70 +9830,49 @@
                 <a:ea typeface="Microsoft JhengHei" pitchFamily="34" charset="-122"/>
                 <a:cs typeface="Microsoft JhengHei" pitchFamily="34" charset="-120"/>
               </a:rPr>
-              <a:t>體驗版</a:t>
-            </a:r>
-            <a:endParaRPr lang="en-US" sz="2400" dirty="0"/>
-          </a:p>
-        </p:txBody>
-      </p:sp>
-      <p:sp>
-        <p:nvSpPr>
-          <p:cNvPr id="10" name="Text 7"/>
-          <p:cNvSpPr/>
-          <p:nvPr/>
-        </p:nvSpPr>
-        <p:spPr>
-          <a:xfrm>
-            <a:off x="566928" y="3346704"/>
-            <a:ext cx="3566160" cy="256032"/>
-          </a:xfrm>
-          <a:prstGeom prst="rect">
-            <a:avLst/>
-          </a:prstGeom>
-          <a:noFill/>
-          <a:ln/>
-        </p:spPr>
-        <p:txBody>
-          <a:bodyPr wrap="square" lIns="0" tIns="0" rIns="0" bIns="0" rtlCol="0" anchor="ctr"/>
-          <a:lstStyle/>
-          <a:p>
-            <a:pPr algn="ctr" indent="0" marL="0">
-              <a:buNone/>
-            </a:pPr>
-            <a:r>
-              <a:rPr lang="en-US" sz="1100" b="1" spc="100" kern="0" dirty="0">
-                <a:solidFill>
-                  <a:srgbClr val="6FB1FF"/>
-                </a:solidFill>
-                <a:latin typeface="Microsoft JhengHei" pitchFamily="34" charset="0"/>
-                <a:ea typeface="Microsoft JhengHei" pitchFamily="34" charset="-122"/>
-                <a:cs typeface="Microsoft JhengHei" pitchFamily="34" charset="-120"/>
-              </a:rPr>
-              <a:t>PoC · 示範驗證</a:t>
-            </a:r>
-            <a:endParaRPr lang="en-US" sz="1100" dirty="0"/>
-          </a:p>
-        </p:txBody>
-      </p:sp>
-      <p:sp>
-        <p:nvSpPr>
-          <p:cNvPr id="11" name="Shape 8"/>
-          <p:cNvSpPr/>
-          <p:nvPr/>
-        </p:nvSpPr>
-        <p:spPr>
-          <a:xfrm>
-            <a:off x="1024128" y="3675888"/>
-            <a:ext cx="2651760" cy="0"/>
+              <a:t>基礎上線
+</a:t>
+            </a:r>
+            <a:pPr indent="0" marL="0">
+              <a:lnSpc>
+                <a:spcPct val="100000"/>
+              </a:lnSpc>
+              <a:buNone/>
+            </a:pPr>
+            <a:r>
+              <a:rPr lang="en-US" sz="900" b="1" spc="100" kern="0" dirty="0">
+                <a:solidFill>
+                  <a:srgbClr val="C9A35A"/>
+                </a:solidFill>
+                <a:latin typeface="Microsoft JhengHei" pitchFamily="34" charset="0"/>
+                <a:ea typeface="Microsoft JhengHei" pitchFamily="34" charset="-122"/>
+                <a:cs typeface="Microsoft JhengHei" pitchFamily="34" charset="-120"/>
+              </a:rPr>
+              <a:t>工程期・交屋前</a:t>
+            </a:r>
+            <a:endParaRPr lang="en-US" sz="1250" dirty="0"/>
+          </a:p>
+        </p:txBody>
+      </p:sp>
+      <p:sp>
+        <p:nvSpPr>
+          <p:cNvPr id="27" name="Shape 25"/>
+          <p:cNvSpPr/>
+          <p:nvPr/>
+        </p:nvSpPr>
+        <p:spPr>
+          <a:xfrm>
+            <a:off x="3511296" y="2267712"/>
+            <a:ext cx="2377440" cy="0"/>
           </a:xfrm>
           <a:prstGeom prst="line">
             <a:avLst/>
           </a:prstGeom>
           <a:noFill/>
-          <a:ln w="6350">
+          <a:ln w="7620">
             <a:solidFill>
               <a:srgbClr val="C9A35A">
-                <a:alpha val="50000"/>
+                <a:alpha val="60000"/>
               </a:srgbClr>
             </a:solidFill>
             <a:prstDash val="dash"/>
@@ -9128,14 +9881,67 @@
       </p:sp>
       <p:sp>
         <p:nvSpPr>
-          <p:cNvPr id="12" name="Text 9"/>
-          <p:cNvSpPr/>
-          <p:nvPr/>
-        </p:nvSpPr>
-        <p:spPr>
-          <a:xfrm>
-            <a:off x="896112" y="3803904"/>
-            <a:ext cx="2999232" cy="1554480"/>
+          <p:cNvPr id="28" name="Text 26"/>
+          <p:cNvSpPr/>
+          <p:nvPr/>
+        </p:nvSpPr>
+        <p:spPr>
+          <a:xfrm>
+            <a:off x="3511296" y="2377440"/>
+            <a:ext cx="2414016" cy="219456"/>
+          </a:xfrm>
+          <a:prstGeom prst="rect">
+            <a:avLst/>
+          </a:prstGeom>
+          <a:noFill/>
+          <a:ln/>
+        </p:spPr>
+        <p:txBody>
+          <a:bodyPr wrap="square" lIns="0" tIns="0" rIns="0" bIns="0" rtlCol="0" anchor="ctr"/>
+          <a:lstStyle/>
+          <a:p>
+            <a:pPr indent="0" marL="0">
+              <a:buNone/>
+            </a:pPr>
+            <a:r>
+              <a:rPr lang="en-US" sz="1000" dirty="0">
+                <a:solidFill>
+                  <a:srgbClr val="C9A35A"/>
+                </a:solidFill>
+                <a:latin typeface="Microsoft JhengHei" pitchFamily="34" charset="0"/>
+                <a:ea typeface="Microsoft JhengHei" pitchFamily="34" charset="-122"/>
+                <a:cs typeface="Microsoft JhengHei" pitchFamily="34" charset="-120"/>
+              </a:rPr>
+              <a:t>● </a:t>
+            </a:r>
+            <a:pPr indent="0" marL="0">
+              <a:buNone/>
+            </a:pPr>
+            <a:r>
+              <a:rPr lang="en-US" sz="1030" b="1" dirty="0">
+                <a:solidFill>
+                  <a:srgbClr val="F6F3EC"/>
+                </a:solidFill>
+                <a:latin typeface="Microsoft JhengHei" pitchFamily="34" charset="0"/>
+                <a:ea typeface="Microsoft JhengHei" pitchFamily="34" charset="-122"/>
+                <a:cs typeface="Microsoft JhengHei" pitchFamily="34" charset="-120"/>
+              </a:rPr>
+              <a:t>路由/防火牆(VLAN)</a:t>
+            </a:r>
+            <a:endParaRPr lang="en-US" sz="1000" dirty="0"/>
+          </a:p>
+        </p:txBody>
+      </p:sp>
+      <p:sp>
+        <p:nvSpPr>
+          <p:cNvPr id="29" name="Text 27"/>
+          <p:cNvSpPr/>
+          <p:nvPr/>
+        </p:nvSpPr>
+        <p:spPr>
+          <a:xfrm>
+            <a:off x="3712464" y="2596896"/>
+            <a:ext cx="2212848" cy="347472"/>
           </a:xfrm>
           <a:prstGeom prst="rect">
             <a:avLst/>
@@ -9147,18 +9953,14 @@
           <a:bodyPr wrap="square" lIns="0" tIns="0" rIns="0" bIns="0" rtlCol="0" anchor="t"/>
           <a:lstStyle/>
           <a:p>
-            <a:pPr marL="177800" indent="-177800">
+            <a:pPr indent="0" marL="0">
               <a:lnSpc>
-                <a:spcPct val="105000"/>
+                <a:spcPct val="98000"/>
               </a:lnSpc>
-              <a:spcAft>
-                <a:spcPts val="800"/>
-              </a:spcAft>
-              <a:buSzPct val="100000"/>
-              <a:buChar char="•"/>
-            </a:pPr>
-            <a:r>
-              <a:rPr lang="en-US" sz="1100" dirty="0">
+              <a:buNone/>
+            </a:pPr>
+            <a:r>
+              <a:rPr lang="en-US" sz="820" dirty="0">
                 <a:solidFill>
                   <a:srgbClr val="CDD8EC"/>
                 </a:solidFill>
@@ -9166,23 +9968,94 @@
                 <a:ea typeface="Microsoft JhengHei" pitchFamily="34" charset="-122"/>
                 <a:cs typeface="Microsoft JhengHei" pitchFamily="34" charset="-120"/>
               </a:rPr>
-              <a:t>現有雲端:Render Free + Vercel</a:t>
-            </a:r>
-            <a:endParaRPr lang="en-US" sz="1100" dirty="0"/>
-          </a:p>
-          <a:p>
-            <a:pPr marL="177800" indent="-177800">
+              <a:t>IoT/管理/訪客網段隔離</a:t>
+            </a:r>
+            <a:endParaRPr lang="en-US" sz="820" dirty="0"/>
+          </a:p>
+        </p:txBody>
+      </p:sp>
+      <p:sp>
+        <p:nvSpPr>
+          <p:cNvPr id="30" name="Text 28"/>
+          <p:cNvSpPr/>
+          <p:nvPr/>
+        </p:nvSpPr>
+        <p:spPr>
+          <a:xfrm>
+            <a:off x="3511296" y="2962656"/>
+            <a:ext cx="2414016" cy="219456"/>
+          </a:xfrm>
+          <a:prstGeom prst="rect">
+            <a:avLst/>
+          </a:prstGeom>
+          <a:noFill/>
+          <a:ln/>
+        </p:spPr>
+        <p:txBody>
+          <a:bodyPr wrap="square" lIns="0" tIns="0" rIns="0" bIns="0" rtlCol="0" anchor="ctr"/>
+          <a:lstStyle/>
+          <a:p>
+            <a:pPr indent="0" marL="0">
+              <a:buNone/>
+            </a:pPr>
+            <a:r>
+              <a:rPr lang="en-US" sz="1000" dirty="0">
+                <a:solidFill>
+                  <a:srgbClr val="C9A35A"/>
+                </a:solidFill>
+                <a:latin typeface="Microsoft JhengHei" pitchFamily="34" charset="0"/>
+                <a:ea typeface="Microsoft JhengHei" pitchFamily="34" charset="-122"/>
+                <a:cs typeface="Microsoft JhengHei" pitchFamily="34" charset="-120"/>
+              </a:rPr>
+              <a:t>● </a:t>
+            </a:r>
+            <a:pPr indent="0" marL="0">
+              <a:buNone/>
+            </a:pPr>
+            <a:r>
+              <a:rPr lang="en-US" sz="1030" b="1" dirty="0">
+                <a:solidFill>
+                  <a:srgbClr val="F6F3EC"/>
+                </a:solidFill>
+                <a:latin typeface="Microsoft JhengHei" pitchFamily="34" charset="0"/>
+                <a:ea typeface="Microsoft JhengHei" pitchFamily="34" charset="-122"/>
+                <a:cs typeface="Microsoft JhengHei" pitchFamily="34" charset="-120"/>
+              </a:rPr>
+              <a:t>PoE 交換器 8–24 埠</a:t>
+            </a:r>
+            <a:endParaRPr lang="en-US" sz="1000" dirty="0"/>
+          </a:p>
+        </p:txBody>
+      </p:sp>
+      <p:sp>
+        <p:nvSpPr>
+          <p:cNvPr id="31" name="Text 29"/>
+          <p:cNvSpPr/>
+          <p:nvPr/>
+        </p:nvSpPr>
+        <p:spPr>
+          <a:xfrm>
+            <a:off x="3712464" y="3182112"/>
+            <a:ext cx="2212848" cy="347472"/>
+          </a:xfrm>
+          <a:prstGeom prst="rect">
+            <a:avLst/>
+          </a:prstGeom>
+          <a:noFill/>
+          <a:ln/>
+        </p:spPr>
+        <p:txBody>
+          <a:bodyPr wrap="square" lIns="0" tIns="0" rIns="0" bIns="0" rtlCol="0" anchor="t"/>
+          <a:lstStyle/>
+          <a:p>
+            <a:pPr indent="0" marL="0">
               <a:lnSpc>
-                <a:spcPct val="105000"/>
+                <a:spcPct val="98000"/>
               </a:lnSpc>
-              <a:spcAft>
-                <a:spcPts val="800"/>
-              </a:spcAft>
-              <a:buSzPct val="100000"/>
-              <a:buChar char="•"/>
-            </a:pPr>
-            <a:r>
-              <a:rPr lang="en-US" sz="1100" dirty="0">
+              <a:buNone/>
+            </a:pPr>
+            <a:r>
+              <a:rPr lang="en-US" sz="820" dirty="0">
                 <a:solidFill>
                   <a:srgbClr val="CDD8EC"/>
                 </a:solidFill>
@@ -9190,23 +10063,94 @@
                 <a:ea typeface="Microsoft JhengHei" pitchFamily="34" charset="-122"/>
                 <a:cs typeface="Microsoft JhengHei" pitchFamily="34" charset="-120"/>
               </a:rPr>
-              <a:t>櫃檯平板 ×1 + 住戶手機 App</a:t>
-            </a:r>
-            <a:endParaRPr lang="en-US" sz="1100" dirty="0"/>
-          </a:p>
-          <a:p>
-            <a:pPr marL="177800" indent="-177800">
+              <a:t>供電掃碼機/攝影機/AP</a:t>
+            </a:r>
+            <a:endParaRPr lang="en-US" sz="820" dirty="0"/>
+          </a:p>
+        </p:txBody>
+      </p:sp>
+      <p:sp>
+        <p:nvSpPr>
+          <p:cNvPr id="32" name="Text 30"/>
+          <p:cNvSpPr/>
+          <p:nvPr/>
+        </p:nvSpPr>
+        <p:spPr>
+          <a:xfrm>
+            <a:off x="3511296" y="3547872"/>
+            <a:ext cx="2414016" cy="219456"/>
+          </a:xfrm>
+          <a:prstGeom prst="rect">
+            <a:avLst/>
+          </a:prstGeom>
+          <a:noFill/>
+          <a:ln/>
+        </p:spPr>
+        <p:txBody>
+          <a:bodyPr wrap="square" lIns="0" tIns="0" rIns="0" bIns="0" rtlCol="0" anchor="ctr"/>
+          <a:lstStyle/>
+          <a:p>
+            <a:pPr indent="0" marL="0">
+              <a:buNone/>
+            </a:pPr>
+            <a:r>
+              <a:rPr lang="en-US" sz="1000" dirty="0">
+                <a:solidFill>
+                  <a:srgbClr val="C9A35A"/>
+                </a:solidFill>
+                <a:latin typeface="Microsoft JhengHei" pitchFamily="34" charset="0"/>
+                <a:ea typeface="Microsoft JhengHei" pitchFamily="34" charset="-122"/>
+                <a:cs typeface="Microsoft JhengHei" pitchFamily="34" charset="-120"/>
+              </a:rPr>
+              <a:t>● </a:t>
+            </a:r>
+            <a:pPr indent="0" marL="0">
+              <a:buNone/>
+            </a:pPr>
+            <a:r>
+              <a:rPr lang="en-US" sz="1030" b="1" dirty="0">
+                <a:solidFill>
+                  <a:srgbClr val="F6F3EC"/>
+                </a:solidFill>
+                <a:latin typeface="Microsoft JhengHei" pitchFamily="34" charset="0"/>
+                <a:ea typeface="Microsoft JhengHei" pitchFamily="34" charset="-122"/>
+                <a:cs typeface="Microsoft JhengHei" pitchFamily="34" charset="-120"/>
+              </a:rPr>
+              <a:t>邊緣閘道主機 + UPS</a:t>
+            </a:r>
+            <a:endParaRPr lang="en-US" sz="1000" dirty="0"/>
+          </a:p>
+        </p:txBody>
+      </p:sp>
+      <p:sp>
+        <p:nvSpPr>
+          <p:cNvPr id="33" name="Text 31"/>
+          <p:cNvSpPr/>
+          <p:nvPr/>
+        </p:nvSpPr>
+        <p:spPr>
+          <a:xfrm>
+            <a:off x="3712464" y="3767328"/>
+            <a:ext cx="2212848" cy="347472"/>
+          </a:xfrm>
+          <a:prstGeom prst="rect">
+            <a:avLst/>
+          </a:prstGeom>
+          <a:noFill/>
+          <a:ln/>
+        </p:spPr>
+        <p:txBody>
+          <a:bodyPr wrap="square" lIns="0" tIns="0" rIns="0" bIns="0" rtlCol="0" anchor="t"/>
+          <a:lstStyle/>
+          <a:p>
+            <a:pPr indent="0" marL="0">
               <a:lnSpc>
-                <a:spcPct val="105000"/>
+                <a:spcPct val="98000"/>
               </a:lnSpc>
-              <a:spcAft>
-                <a:spcPts val="800"/>
-              </a:spcAft>
-              <a:buSzPct val="100000"/>
-              <a:buChar char="•"/>
-            </a:pPr>
-            <a:r>
-              <a:rPr lang="en-US" sz="1100" dirty="0">
+              <a:buNone/>
+            </a:pPr>
+            <a:r>
+              <a:rPr lang="en-US" sz="820" dirty="0">
                 <a:solidFill>
                   <a:srgbClr val="CDD8EC"/>
                 </a:solidFill>
@@ -9214,23 +10158,94 @@
                 <a:ea typeface="Microsoft JhengHei" pitchFamily="34" charset="-122"/>
                 <a:cs typeface="Microsoft JhengHei" pitchFamily="34" charset="-120"/>
               </a:rPr>
-              <a:t>示範閘道 ×1(或 DRY_RUN 乾跑)</a:t>
-            </a:r>
-            <a:endParaRPr lang="en-US" sz="1100" dirty="0"/>
-          </a:p>
-          <a:p>
-            <a:pPr marL="177800" indent="-177800">
+              <a:t>工控機常駐 + 斷電續航</a:t>
+            </a:r>
+            <a:endParaRPr lang="en-US" sz="820" dirty="0"/>
+          </a:p>
+        </p:txBody>
+      </p:sp>
+      <p:sp>
+        <p:nvSpPr>
+          <p:cNvPr id="34" name="Text 32"/>
+          <p:cNvSpPr/>
+          <p:nvPr/>
+        </p:nvSpPr>
+        <p:spPr>
+          <a:xfrm>
+            <a:off x="3511296" y="4133088"/>
+            <a:ext cx="2414016" cy="219456"/>
+          </a:xfrm>
+          <a:prstGeom prst="rect">
+            <a:avLst/>
+          </a:prstGeom>
+          <a:noFill/>
+          <a:ln/>
+        </p:spPr>
+        <p:txBody>
+          <a:bodyPr wrap="square" lIns="0" tIns="0" rIns="0" bIns="0" rtlCol="0" anchor="ctr"/>
+          <a:lstStyle/>
+          <a:p>
+            <a:pPr indent="0" marL="0">
+              <a:buNone/>
+            </a:pPr>
+            <a:r>
+              <a:rPr lang="en-US" sz="1000" dirty="0">
+                <a:solidFill>
+                  <a:srgbClr val="C9A35A"/>
+                </a:solidFill>
+                <a:latin typeface="Microsoft JhengHei" pitchFamily="34" charset="0"/>
+                <a:ea typeface="Microsoft JhengHei" pitchFamily="34" charset="-122"/>
+                <a:cs typeface="Microsoft JhengHei" pitchFamily="34" charset="-120"/>
+              </a:rPr>
+              <a:t>● </a:t>
+            </a:r>
+            <a:pPr indent="0" marL="0">
+              <a:buNone/>
+            </a:pPr>
+            <a:r>
+              <a:rPr lang="en-US" sz="1030" b="1" dirty="0">
+                <a:solidFill>
+                  <a:srgbClr val="F6F3EC"/>
+                </a:solidFill>
+                <a:latin typeface="Microsoft JhengHei" pitchFamily="34" charset="0"/>
+                <a:ea typeface="Microsoft JhengHei" pitchFamily="34" charset="-122"/>
+                <a:cs typeface="Microsoft JhengHei" pitchFamily="34" charset="-120"/>
+              </a:rPr>
+              <a:t>櫃檯平板・管理 Kiosk</a:t>
+            </a:r>
+            <a:endParaRPr lang="en-US" sz="1000" dirty="0"/>
+          </a:p>
+        </p:txBody>
+      </p:sp>
+      <p:sp>
+        <p:nvSpPr>
+          <p:cNvPr id="35" name="Text 33"/>
+          <p:cNvSpPr/>
+          <p:nvPr/>
+        </p:nvSpPr>
+        <p:spPr>
+          <a:xfrm>
+            <a:off x="3712464" y="4352544"/>
+            <a:ext cx="2212848" cy="347472"/>
+          </a:xfrm>
+          <a:prstGeom prst="rect">
+            <a:avLst/>
+          </a:prstGeom>
+          <a:noFill/>
+          <a:ln/>
+        </p:spPr>
+        <p:txBody>
+          <a:bodyPr wrap="square" lIns="0" tIns="0" rIns="0" bIns="0" rtlCol="0" anchor="t"/>
+          <a:lstStyle/>
+          <a:p>
+            <a:pPr indent="0" marL="0">
               <a:lnSpc>
-                <a:spcPct val="105000"/>
+                <a:spcPct val="98000"/>
               </a:lnSpc>
-              <a:spcAft>
-                <a:spcPts val="800"/>
-              </a:spcAft>
-              <a:buSzPct val="100000"/>
-              <a:buChar char="•"/>
-            </a:pPr>
-            <a:r>
-              <a:rPr lang="en-US" sz="1100" dirty="0">
+              <a:buNone/>
+            </a:pPr>
+            <a:r>
+              <a:rPr lang="en-US" sz="820" dirty="0">
                 <a:solidFill>
                   <a:srgbClr val="CDD8EC"/>
                 </a:solidFill>
@@ -9238,23 +10253,94 @@
                 <a:ea typeface="Microsoft JhengHei" pitchFamily="34" charset="-122"/>
                 <a:cs typeface="Microsoft JhengHei" pitchFamily="34" charset="-120"/>
               </a:rPr>
-              <a:t>少量燈光 / 空調示範設備</a:t>
-            </a:r>
-            <a:endParaRPr lang="en-US" sz="1100" dirty="0"/>
-          </a:p>
-          <a:p>
-            <a:pPr marL="177800" indent="-177800">
+              <a:t>物業營運雙終端</a:t>
+            </a:r>
+            <a:endParaRPr lang="en-US" sz="820" dirty="0"/>
+          </a:p>
+        </p:txBody>
+      </p:sp>
+      <p:sp>
+        <p:nvSpPr>
+          <p:cNvPr id="36" name="Text 34"/>
+          <p:cNvSpPr/>
+          <p:nvPr/>
+        </p:nvSpPr>
+        <p:spPr>
+          <a:xfrm>
+            <a:off x="3511296" y="4718304"/>
+            <a:ext cx="2414016" cy="219456"/>
+          </a:xfrm>
+          <a:prstGeom prst="rect">
+            <a:avLst/>
+          </a:prstGeom>
+          <a:noFill/>
+          <a:ln/>
+        </p:spPr>
+        <p:txBody>
+          <a:bodyPr wrap="square" lIns="0" tIns="0" rIns="0" bIns="0" rtlCol="0" anchor="ctr"/>
+          <a:lstStyle/>
+          <a:p>
+            <a:pPr indent="0" marL="0">
+              <a:buNone/>
+            </a:pPr>
+            <a:r>
+              <a:rPr lang="en-US" sz="1000" dirty="0">
+                <a:solidFill>
+                  <a:srgbClr val="69D6A8"/>
+                </a:solidFill>
+                <a:latin typeface="Microsoft JhengHei" pitchFamily="34" charset="0"/>
+                <a:ea typeface="Microsoft JhengHei" pitchFamily="34" charset="-122"/>
+                <a:cs typeface="Microsoft JhengHei" pitchFamily="34" charset="-120"/>
+              </a:rPr>
+              <a:t>● </a:t>
+            </a:r>
+            <a:pPr indent="0" marL="0">
+              <a:buNone/>
+            </a:pPr>
+            <a:r>
+              <a:rPr lang="en-US" sz="1030" b="1" dirty="0">
+                <a:solidFill>
+                  <a:srgbClr val="F6F3EC"/>
+                </a:solidFill>
+                <a:latin typeface="Microsoft JhengHei" pitchFamily="34" charset="0"/>
+                <a:ea typeface="Microsoft JhengHei" pitchFamily="34" charset="-122"/>
+                <a:cs typeface="Microsoft JhengHei" pitchFamily="34" charset="-120"/>
+              </a:rPr>
+              <a:t>雲端升級 Starter</a:t>
+            </a:r>
+            <a:endParaRPr lang="en-US" sz="1000" dirty="0"/>
+          </a:p>
+        </p:txBody>
+      </p:sp>
+      <p:sp>
+        <p:nvSpPr>
+          <p:cNvPr id="37" name="Text 35"/>
+          <p:cNvSpPr/>
+          <p:nvPr/>
+        </p:nvSpPr>
+        <p:spPr>
+          <a:xfrm>
+            <a:off x="3712464" y="4937760"/>
+            <a:ext cx="2212848" cy="347472"/>
+          </a:xfrm>
+          <a:prstGeom prst="rect">
+            <a:avLst/>
+          </a:prstGeom>
+          <a:noFill/>
+          <a:ln/>
+        </p:spPr>
+        <p:txBody>
+          <a:bodyPr wrap="square" lIns="0" tIns="0" rIns="0" bIns="0" rtlCol="0" anchor="t"/>
+          <a:lstStyle/>
+          <a:p>
+            <a:pPr indent="0" marL="0">
               <a:lnSpc>
-                <a:spcPct val="105000"/>
+                <a:spcPct val="98000"/>
               </a:lnSpc>
-              <a:spcAft>
-                <a:spcPts val="800"/>
-              </a:spcAft>
-              <a:buSzPct val="100000"/>
-              <a:buChar char="•"/>
-            </a:pPr>
-            <a:r>
-              <a:rPr lang="en-US" sz="1100" dirty="0">
+              <a:buNone/>
+            </a:pPr>
+            <a:r>
+              <a:rPr lang="en-US" sz="820" dirty="0">
                 <a:solidFill>
                   <a:srgbClr val="CDD8EC"/>
                 </a:solidFill>
@@ -9262,26 +10348,26 @@
                 <a:ea typeface="Microsoft JhengHei" pitchFamily="34" charset="-122"/>
                 <a:cs typeface="Microsoft JhengHei" pitchFamily="34" charset="-120"/>
               </a:rPr>
-              <a:t>Google Nest 音箱 ×1(裝置控制)</a:t>
-            </a:r>
-            <a:endParaRPr lang="en-US" sz="1100" dirty="0"/>
-          </a:p>
-        </p:txBody>
-      </p:sp>
-      <p:sp>
-        <p:nvSpPr>
-          <p:cNvPr id="13" name="Shape 10"/>
-          <p:cNvSpPr/>
-          <p:nvPr/>
-        </p:nvSpPr>
-        <p:spPr>
-          <a:xfrm>
-            <a:off x="822960" y="5431536"/>
-            <a:ext cx="3054096" cy="384048"/>
+              <a:t>持久磁碟,正式營運等級</a:t>
+            </a:r>
+            <a:endParaRPr lang="en-US" sz="820" dirty="0"/>
+          </a:p>
+        </p:txBody>
+      </p:sp>
+      <p:sp>
+        <p:nvSpPr>
+          <p:cNvPr id="38" name="Shape 36"/>
+          <p:cNvSpPr/>
+          <p:nvPr/>
+        </p:nvSpPr>
+        <p:spPr>
+          <a:xfrm>
+            <a:off x="3474720" y="5340096"/>
+            <a:ext cx="2450592" cy="329184"/>
           </a:xfrm>
           <a:prstGeom prst="roundRect">
             <a:avLst>
-              <a:gd name="adj" fmla="val 19048"/>
+              <a:gd name="adj" fmla="val 19444"/>
             </a:avLst>
           </a:prstGeom>
           <a:solidFill>
@@ -9289,7 +10375,772 @@
               <a:alpha val="90000"/>
             </a:srgbClr>
           </a:solidFill>
+          <a:ln w="7620">
+            <a:solidFill>
+              <a:srgbClr val="C9A35A">
+                <a:alpha val="55000"/>
+              </a:srgbClr>
+            </a:solidFill>
+            <a:prstDash val="solid"/>
+          </a:ln>
+        </p:spPr>
+      </p:sp>
+      <p:sp>
+        <p:nvSpPr>
+          <p:cNvPr id="39" name="Text 37"/>
+          <p:cNvSpPr/>
+          <p:nvPr/>
+        </p:nvSpPr>
+        <p:spPr>
+          <a:xfrm>
+            <a:off x="3474720" y="5340096"/>
+            <a:ext cx="2450592" cy="329184"/>
+          </a:xfrm>
+          <a:prstGeom prst="rect">
+            <a:avLst/>
+          </a:prstGeom>
+          <a:noFill/>
+          <a:ln/>
+        </p:spPr>
+        <p:txBody>
+          <a:bodyPr wrap="square" lIns="0" tIns="0" rIns="0" bIns="0" rtlCol="0" anchor="ctr"/>
+          <a:lstStyle/>
+          <a:p>
+            <a:pPr algn="ctr" indent="0" marL="0">
+              <a:buNone/>
+            </a:pPr>
+            <a:r>
+              <a:rPr lang="en-US" sz="900" b="1" dirty="0">
+                <a:solidFill>
+                  <a:srgbClr val="E6CF9A"/>
+                </a:solidFill>
+                <a:latin typeface="Microsoft JhengHei" pitchFamily="34" charset="0"/>
+                <a:ea typeface="Microsoft JhengHei" pitchFamily="34" charset="-122"/>
+                <a:cs typeface="Microsoft JhengHei" pitchFamily="34" charset="-120"/>
+              </a:rPr>
+              <a:t>機房/弱電需工程期預留</a:t>
+            </a:r>
+            <a:endParaRPr lang="en-US" sz="900" dirty="0"/>
+          </a:p>
+        </p:txBody>
+      </p:sp>
+      <p:sp>
+        <p:nvSpPr>
+          <p:cNvPr id="40" name="Text 38"/>
+          <p:cNvSpPr/>
+          <p:nvPr/>
+        </p:nvSpPr>
+        <p:spPr>
+          <a:xfrm>
+            <a:off x="6044184" y="1719072"/>
+            <a:ext cx="164592" cy="402336"/>
+          </a:xfrm>
+          <a:prstGeom prst="rect">
+            <a:avLst/>
+          </a:prstGeom>
+          <a:noFill/>
+          <a:ln/>
+        </p:spPr>
+        <p:txBody>
+          <a:bodyPr wrap="square" lIns="0" tIns="0" rIns="0" bIns="0" rtlCol="0" anchor="ctr"/>
+          <a:lstStyle/>
+          <a:p>
+            <a:pPr algn="ctr" indent="0" marL="0">
+              <a:buNone/>
+            </a:pPr>
+            <a:r>
+              <a:rPr lang="en-US" sz="1300" b="1" dirty="0">
+                <a:solidFill>
+                  <a:srgbClr val="C9A35A"/>
+                </a:solidFill>
+              </a:rPr>
+              <a:t>→</a:t>
+            </a:r>
+            <a:endParaRPr lang="en-US" sz="1300" dirty="0"/>
+          </a:p>
+        </p:txBody>
+      </p:sp>
+      <p:sp>
+        <p:nvSpPr>
+          <p:cNvPr id="41" name="Shape 39"/>
+          <p:cNvSpPr/>
+          <p:nvPr/>
+        </p:nvSpPr>
+        <p:spPr>
+          <a:xfrm>
+            <a:off x="6181344" y="1572768"/>
+            <a:ext cx="2743200" cy="4224528"/>
+          </a:xfrm>
+          <a:prstGeom prst="roundRect">
+            <a:avLst>
+              <a:gd name="adj" fmla="val 3667"/>
+            </a:avLst>
+          </a:prstGeom>
+          <a:solidFill>
+            <a:srgbClr val="12203A">
+              <a:alpha val="80000"/>
+            </a:srgbClr>
+          </a:solidFill>
           <a:ln w="9525">
+            <a:solidFill>
+              <a:srgbClr val="C9A35A">
+                <a:alpha val="42000"/>
+              </a:srgbClr>
+            </a:solidFill>
+            <a:prstDash val="solid"/>
+          </a:ln>
+          <a:effectLst>
+            <a:outerShdw sx="100000" sy="100000" kx="0" ky="0" algn="bl" rotWithShape="0" blurRad="101600" dist="38100" dir="5400000">
+              <a:srgbClr val="000000">
+                <a:alpha val="30000"/>
+              </a:srgbClr>
+            </a:outerShdw>
+          </a:effectLst>
+        </p:spPr>
+      </p:sp>
+      <p:sp>
+        <p:nvSpPr>
+          <p:cNvPr id="42" name="Shape 40"/>
+          <p:cNvSpPr/>
+          <p:nvPr/>
+        </p:nvSpPr>
+        <p:spPr>
+          <a:xfrm>
+            <a:off x="6382512" y="1719072"/>
+            <a:ext cx="402336" cy="402336"/>
+          </a:xfrm>
+          <a:prstGeom prst="ellipse">
+            <a:avLst/>
+          </a:prstGeom>
+          <a:solidFill>
+            <a:srgbClr val="6FB1FF"/>
+          </a:solidFill>
+          <a:ln w="15240">
+            <a:solidFill>
+              <a:srgbClr val="0B1220"/>
+            </a:solidFill>
+            <a:prstDash val="solid"/>
+          </a:ln>
+        </p:spPr>
+      </p:sp>
+      <p:sp>
+        <p:nvSpPr>
+          <p:cNvPr id="43" name="Text 41"/>
+          <p:cNvSpPr/>
+          <p:nvPr/>
+        </p:nvSpPr>
+        <p:spPr>
+          <a:xfrm>
+            <a:off x="6382512" y="1719072"/>
+            <a:ext cx="402336" cy="402336"/>
+          </a:xfrm>
+          <a:prstGeom prst="rect">
+            <a:avLst/>
+          </a:prstGeom>
+          <a:noFill/>
+          <a:ln/>
+        </p:spPr>
+        <p:txBody>
+          <a:bodyPr wrap="square" lIns="0" tIns="0" rIns="0" bIns="0" rtlCol="0" anchor="ctr"/>
+          <a:lstStyle/>
+          <a:p>
+            <a:pPr algn="ctr" indent="0" marL="0">
+              <a:buNone/>
+            </a:pPr>
+            <a:r>
+              <a:rPr lang="en-US" sz="1150" b="1" dirty="0">
+                <a:solidFill>
+                  <a:srgbClr val="0B1220"/>
+                </a:solidFill>
+              </a:rPr>
+              <a:t>P2</a:t>
+            </a:r>
+            <a:endParaRPr lang="en-US" sz="1150" dirty="0"/>
+          </a:p>
+        </p:txBody>
+      </p:sp>
+      <p:sp>
+        <p:nvSpPr>
+          <p:cNvPr id="44" name="Text 42"/>
+          <p:cNvSpPr/>
+          <p:nvPr/>
+        </p:nvSpPr>
+        <p:spPr>
+          <a:xfrm>
+            <a:off x="6876288" y="1682496"/>
+            <a:ext cx="1920240" cy="493776"/>
+          </a:xfrm>
+          <a:prstGeom prst="rect">
+            <a:avLst/>
+          </a:prstGeom>
+          <a:noFill/>
+          <a:ln/>
+        </p:spPr>
+        <p:txBody>
+          <a:bodyPr wrap="square" lIns="0" tIns="0" rIns="0" bIns="0" rtlCol="0" anchor="ctr"/>
+          <a:lstStyle/>
+          <a:p>
+            <a:pPr indent="0" marL="0">
+              <a:lnSpc>
+                <a:spcPct val="100000"/>
+              </a:lnSpc>
+              <a:buNone/>
+            </a:pPr>
+            <a:r>
+              <a:rPr lang="en-US" sz="1250" b="1" dirty="0">
+                <a:solidFill>
+                  <a:srgbClr val="F6F3EC"/>
+                </a:solidFill>
+                <a:latin typeface="Microsoft JhengHei" pitchFamily="34" charset="0"/>
+                <a:ea typeface="Microsoft JhengHei" pitchFamily="34" charset="-122"/>
+                <a:cs typeface="Microsoft JhengHei" pitchFamily="34" charset="-120"/>
+              </a:rPr>
+              <a:t>智慧擴充
+</a:t>
+            </a:r>
+            <a:pPr indent="0" marL="0">
+              <a:lnSpc>
+                <a:spcPct val="100000"/>
+              </a:lnSpc>
+              <a:buNone/>
+            </a:pPr>
+            <a:r>
+              <a:rPr lang="en-US" sz="900" b="1" spc="100" kern="0" dirty="0">
+                <a:solidFill>
+                  <a:srgbClr val="6FB1FF"/>
+                </a:solidFill>
+                <a:latin typeface="Microsoft JhengHei" pitchFamily="34" charset="0"/>
+                <a:ea typeface="Microsoft JhengHei" pitchFamily="34" charset="-122"/>
+                <a:cs typeface="Microsoft JhengHei" pitchFamily="34" charset="-120"/>
+              </a:rPr>
+              <a:t>交屋・入住期</a:t>
+            </a:r>
+            <a:endParaRPr lang="en-US" sz="1250" dirty="0"/>
+          </a:p>
+        </p:txBody>
+      </p:sp>
+      <p:sp>
+        <p:nvSpPr>
+          <p:cNvPr id="45" name="Shape 43"/>
+          <p:cNvSpPr/>
+          <p:nvPr/>
+        </p:nvSpPr>
+        <p:spPr>
+          <a:xfrm>
+            <a:off x="6364224" y="2267712"/>
+            <a:ext cx="2377440" cy="0"/>
+          </a:xfrm>
+          <a:prstGeom prst="line">
+            <a:avLst/>
+          </a:prstGeom>
+          <a:noFill/>
+          <a:ln w="7620">
+            <a:solidFill>
+              <a:srgbClr val="6FB1FF">
+                <a:alpha val="60000"/>
+              </a:srgbClr>
+            </a:solidFill>
+            <a:prstDash val="dash"/>
+          </a:ln>
+        </p:spPr>
+      </p:sp>
+      <p:sp>
+        <p:nvSpPr>
+          <p:cNvPr id="46" name="Text 44"/>
+          <p:cNvSpPr/>
+          <p:nvPr/>
+        </p:nvSpPr>
+        <p:spPr>
+          <a:xfrm>
+            <a:off x="6364224" y="2377440"/>
+            <a:ext cx="2414016" cy="219456"/>
+          </a:xfrm>
+          <a:prstGeom prst="rect">
+            <a:avLst/>
+          </a:prstGeom>
+          <a:noFill/>
+          <a:ln/>
+        </p:spPr>
+        <p:txBody>
+          <a:bodyPr wrap="square" lIns="0" tIns="0" rIns="0" bIns="0" rtlCol="0" anchor="ctr"/>
+          <a:lstStyle/>
+          <a:p>
+            <a:pPr indent="0" marL="0">
+              <a:buNone/>
+            </a:pPr>
+            <a:r>
+              <a:rPr lang="en-US" sz="1000" dirty="0">
+                <a:solidFill>
+                  <a:srgbClr val="6FB1FF"/>
+                </a:solidFill>
+                <a:latin typeface="Microsoft JhengHei" pitchFamily="34" charset="0"/>
+                <a:ea typeface="Microsoft JhengHei" pitchFamily="34" charset="-122"/>
+                <a:cs typeface="Microsoft JhengHei" pitchFamily="34" charset="-120"/>
+              </a:rPr>
+              <a:t>○ </a:t>
+            </a:r>
+            <a:pPr indent="0" marL="0">
+              <a:buNone/>
+            </a:pPr>
+            <a:r>
+              <a:rPr lang="en-US" sz="1030" b="1" dirty="0">
+                <a:solidFill>
+                  <a:srgbClr val="F6F3EC"/>
+                </a:solidFill>
+                <a:latin typeface="Microsoft JhengHei" pitchFamily="34" charset="0"/>
+                <a:ea typeface="Microsoft JhengHei" pitchFamily="34" charset="-122"/>
+                <a:cs typeface="Microsoft JhengHei" pitchFamily="34" charset="-120"/>
+              </a:rPr>
+              <a:t>大廳 QR 掃碼門禁</a:t>
+            </a:r>
+            <a:endParaRPr lang="en-US" sz="1000" dirty="0"/>
+          </a:p>
+        </p:txBody>
+      </p:sp>
+      <p:sp>
+        <p:nvSpPr>
+          <p:cNvPr id="47" name="Text 45"/>
+          <p:cNvSpPr/>
+          <p:nvPr/>
+        </p:nvSpPr>
+        <p:spPr>
+          <a:xfrm>
+            <a:off x="6565392" y="2596896"/>
+            <a:ext cx="2212848" cy="347472"/>
+          </a:xfrm>
+          <a:prstGeom prst="rect">
+            <a:avLst/>
+          </a:prstGeom>
+          <a:noFill/>
+          <a:ln/>
+        </p:spPr>
+        <p:txBody>
+          <a:bodyPr wrap="square" lIns="0" tIns="0" rIns="0" bIns="0" rtlCol="0" anchor="t"/>
+          <a:lstStyle/>
+          <a:p>
+            <a:pPr indent="0" marL="0">
+              <a:lnSpc>
+                <a:spcPct val="98000"/>
+              </a:lnSpc>
+              <a:buNone/>
+            </a:pPr>
+            <a:r>
+              <a:rPr lang="en-US" sz="820" dirty="0">
+                <a:solidFill>
+                  <a:srgbClr val="CDD8EC"/>
+                </a:solidFill>
+                <a:latin typeface="Microsoft JhengHei" pitchFamily="34" charset="0"/>
+                <a:ea typeface="Microsoft JhengHei" pitchFamily="34" charset="-122"/>
+                <a:cs typeface="Microsoft JhengHei" pitchFamily="34" charset="-120"/>
+              </a:rPr>
+              <a:t>通行證 QR 已實作,接上即用</a:t>
+            </a:r>
+            <a:endParaRPr lang="en-US" sz="820" dirty="0"/>
+          </a:p>
+        </p:txBody>
+      </p:sp>
+      <p:sp>
+        <p:nvSpPr>
+          <p:cNvPr id="48" name="Text 46"/>
+          <p:cNvSpPr/>
+          <p:nvPr/>
+        </p:nvSpPr>
+        <p:spPr>
+          <a:xfrm>
+            <a:off x="6364224" y="2962656"/>
+            <a:ext cx="2414016" cy="219456"/>
+          </a:xfrm>
+          <a:prstGeom prst="rect">
+            <a:avLst/>
+          </a:prstGeom>
+          <a:noFill/>
+          <a:ln/>
+        </p:spPr>
+        <p:txBody>
+          <a:bodyPr wrap="square" lIns="0" tIns="0" rIns="0" bIns="0" rtlCol="0" anchor="ctr"/>
+          <a:lstStyle/>
+          <a:p>
+            <a:pPr indent="0" marL="0">
+              <a:buNone/>
+            </a:pPr>
+            <a:r>
+              <a:rPr lang="en-US" sz="1000" dirty="0">
+                <a:solidFill>
+                  <a:srgbClr val="69D6A8"/>
+                </a:solidFill>
+                <a:latin typeface="Microsoft JhengHei" pitchFamily="34" charset="0"/>
+                <a:ea typeface="Microsoft JhengHei" pitchFamily="34" charset="-122"/>
+                <a:cs typeface="Microsoft JhengHei" pitchFamily="34" charset="-120"/>
+              </a:rPr>
+              <a:t>● </a:t>
+            </a:r>
+            <a:pPr indent="0" marL="0">
+              <a:buNone/>
+            </a:pPr>
+            <a:r>
+              <a:rPr lang="en-US" sz="1030" b="1" dirty="0">
+                <a:solidFill>
+                  <a:srgbClr val="F6F3EC"/>
+                </a:solidFill>
+                <a:latin typeface="Microsoft JhengHei" pitchFamily="34" charset="0"/>
+                <a:ea typeface="Microsoft JhengHei" pitchFamily="34" charset="-122"/>
+                <a:cs typeface="Microsoft JhengHei" pitchFamily="34" charset="-120"/>
+              </a:rPr>
+              <a:t>住戶 IoT 設備</a:t>
+            </a:r>
+            <a:endParaRPr lang="en-US" sz="1000" dirty="0"/>
+          </a:p>
+        </p:txBody>
+      </p:sp>
+      <p:sp>
+        <p:nvSpPr>
+          <p:cNvPr id="49" name="Text 47"/>
+          <p:cNvSpPr/>
+          <p:nvPr/>
+        </p:nvSpPr>
+        <p:spPr>
+          <a:xfrm>
+            <a:off x="6565392" y="3182112"/>
+            <a:ext cx="2212848" cy="347472"/>
+          </a:xfrm>
+          <a:prstGeom prst="rect">
+            <a:avLst/>
+          </a:prstGeom>
+          <a:noFill/>
+          <a:ln/>
+        </p:spPr>
+        <p:txBody>
+          <a:bodyPr wrap="square" lIns="0" tIns="0" rIns="0" bIns="0" rtlCol="0" anchor="t"/>
+          <a:lstStyle/>
+          <a:p>
+            <a:pPr indent="0" marL="0">
+              <a:lnSpc>
+                <a:spcPct val="98000"/>
+              </a:lnSpc>
+              <a:buNone/>
+            </a:pPr>
+            <a:r>
+              <a:rPr lang="en-US" sz="820" dirty="0">
+                <a:solidFill>
+                  <a:srgbClr val="CDD8EC"/>
+                </a:solidFill>
+                <a:latin typeface="Microsoft JhengHei" pitchFamily="34" charset="0"/>
+                <a:ea typeface="Microsoft JhengHei" pitchFamily="34" charset="-122"/>
+                <a:cs typeface="Microsoft JhengHei" pitchFamily="34" charset="-120"/>
+              </a:rPr>
+              <a:t>光/空調/窗簾,App 控制</a:t>
+            </a:r>
+            <a:endParaRPr lang="en-US" sz="820" dirty="0"/>
+          </a:p>
+        </p:txBody>
+      </p:sp>
+      <p:sp>
+        <p:nvSpPr>
+          <p:cNvPr id="50" name="Text 48"/>
+          <p:cNvSpPr/>
+          <p:nvPr/>
+        </p:nvSpPr>
+        <p:spPr>
+          <a:xfrm>
+            <a:off x="6364224" y="3547872"/>
+            <a:ext cx="2414016" cy="219456"/>
+          </a:xfrm>
+          <a:prstGeom prst="rect">
+            <a:avLst/>
+          </a:prstGeom>
+          <a:noFill/>
+          <a:ln/>
+        </p:spPr>
+        <p:txBody>
+          <a:bodyPr wrap="square" lIns="0" tIns="0" rIns="0" bIns="0" rtlCol="0" anchor="ctr"/>
+          <a:lstStyle/>
+          <a:p>
+            <a:pPr indent="0" marL="0">
+              <a:buNone/>
+            </a:pPr>
+            <a:r>
+              <a:rPr lang="en-US" sz="1000" dirty="0">
+                <a:solidFill>
+                  <a:srgbClr val="69D6A8"/>
+                </a:solidFill>
+                <a:latin typeface="Microsoft JhengHei" pitchFamily="34" charset="0"/>
+                <a:ea typeface="Microsoft JhengHei" pitchFamily="34" charset="-122"/>
+                <a:cs typeface="Microsoft JhengHei" pitchFamily="34" charset="-120"/>
+              </a:rPr>
+              <a:t>● </a:t>
+            </a:r>
+            <a:pPr indent="0" marL="0">
+              <a:buNone/>
+            </a:pPr>
+            <a:r>
+              <a:rPr lang="en-US" sz="1030" b="1" dirty="0">
+                <a:solidFill>
+                  <a:srgbClr val="F6F3EC"/>
+                </a:solidFill>
+                <a:latin typeface="Microsoft JhengHei" pitchFamily="34" charset="0"/>
+                <a:ea typeface="Microsoft JhengHei" pitchFamily="34" charset="-122"/>
+                <a:cs typeface="Microsoft JhengHei" pitchFamily="34" charset="-120"/>
+              </a:rPr>
+              <a:t>Nest 音箱/顯示器</a:t>
+            </a:r>
+            <a:endParaRPr lang="en-US" sz="1000" dirty="0"/>
+          </a:p>
+        </p:txBody>
+      </p:sp>
+      <p:sp>
+        <p:nvSpPr>
+          <p:cNvPr id="51" name="Text 49"/>
+          <p:cNvSpPr/>
+          <p:nvPr/>
+        </p:nvSpPr>
+        <p:spPr>
+          <a:xfrm>
+            <a:off x="6565392" y="3767328"/>
+            <a:ext cx="2212848" cy="347472"/>
+          </a:xfrm>
+          <a:prstGeom prst="rect">
+            <a:avLst/>
+          </a:prstGeom>
+          <a:noFill/>
+          <a:ln/>
+        </p:spPr>
+        <p:txBody>
+          <a:bodyPr wrap="square" lIns="0" tIns="0" rIns="0" bIns="0" rtlCol="0" anchor="t"/>
+          <a:lstStyle/>
+          <a:p>
+            <a:pPr indent="0" marL="0">
+              <a:lnSpc>
+                <a:spcPct val="98000"/>
+              </a:lnSpc>
+              <a:buNone/>
+            </a:pPr>
+            <a:r>
+              <a:rPr lang="en-US" sz="820" dirty="0">
+                <a:solidFill>
+                  <a:srgbClr val="CDD8EC"/>
+                </a:solidFill>
+                <a:latin typeface="Microsoft JhengHei" pitchFamily="34" charset="0"/>
+                <a:ea typeface="Microsoft JhengHei" pitchFamily="34" charset="-122"/>
+                <a:cs typeface="Microsoft JhengHei" pitchFamily="34" charset="-120"/>
+              </a:rPr>
+              <a:t>住戶語音裝置控制</a:t>
+            </a:r>
+            <a:endParaRPr lang="en-US" sz="820" dirty="0"/>
+          </a:p>
+        </p:txBody>
+      </p:sp>
+      <p:sp>
+        <p:nvSpPr>
+          <p:cNvPr id="52" name="Text 50"/>
+          <p:cNvSpPr/>
+          <p:nvPr/>
+        </p:nvSpPr>
+        <p:spPr>
+          <a:xfrm>
+            <a:off x="6364224" y="4133088"/>
+            <a:ext cx="2414016" cy="219456"/>
+          </a:xfrm>
+          <a:prstGeom prst="rect">
+            <a:avLst/>
+          </a:prstGeom>
+          <a:noFill/>
+          <a:ln/>
+        </p:spPr>
+        <p:txBody>
+          <a:bodyPr wrap="square" lIns="0" tIns="0" rIns="0" bIns="0" rtlCol="0" anchor="ctr"/>
+          <a:lstStyle/>
+          <a:p>
+            <a:pPr indent="0" marL="0">
+              <a:buNone/>
+            </a:pPr>
+            <a:r>
+              <a:rPr lang="en-US" sz="1000" dirty="0">
+                <a:solidFill>
+                  <a:srgbClr val="C9A35A"/>
+                </a:solidFill>
+                <a:latin typeface="Microsoft JhengHei" pitchFamily="34" charset="0"/>
+                <a:ea typeface="Microsoft JhengHei" pitchFamily="34" charset="-122"/>
+                <a:cs typeface="Microsoft JhengHei" pitchFamily="34" charset="-120"/>
+              </a:rPr>
+              <a:t>● </a:t>
+            </a:r>
+            <a:pPr indent="0" marL="0">
+              <a:buNone/>
+            </a:pPr>
+            <a:r>
+              <a:rPr lang="en-US" sz="1030" b="1" dirty="0">
+                <a:solidFill>
+                  <a:srgbClr val="F6F3EC"/>
+                </a:solidFill>
+                <a:latin typeface="Microsoft JhengHei" pitchFamily="34" charset="0"/>
+                <a:ea typeface="Microsoft JhengHei" pitchFamily="34" charset="-122"/>
+                <a:cs typeface="Microsoft JhengHei" pitchFamily="34" charset="-120"/>
+              </a:rPr>
+              <a:t>Nest Wifi Pro(6E)</a:t>
+            </a:r>
+            <a:endParaRPr lang="en-US" sz="1000" dirty="0"/>
+          </a:p>
+        </p:txBody>
+      </p:sp>
+      <p:sp>
+        <p:nvSpPr>
+          <p:cNvPr id="53" name="Text 51"/>
+          <p:cNvSpPr/>
+          <p:nvPr/>
+        </p:nvSpPr>
+        <p:spPr>
+          <a:xfrm>
+            <a:off x="6565392" y="4352544"/>
+            <a:ext cx="2212848" cy="347472"/>
+          </a:xfrm>
+          <a:prstGeom prst="rect">
+            <a:avLst/>
+          </a:prstGeom>
+          <a:noFill/>
+          <a:ln/>
+        </p:spPr>
+        <p:txBody>
+          <a:bodyPr wrap="square" lIns="0" tIns="0" rIns="0" bIns="0" rtlCol="0" anchor="t"/>
+          <a:lstStyle/>
+          <a:p>
+            <a:pPr indent="0" marL="0">
+              <a:lnSpc>
+                <a:spcPct val="98000"/>
+              </a:lnSpc>
+              <a:buNone/>
+            </a:pPr>
+            <a:r>
+              <a:rPr lang="en-US" sz="820" dirty="0">
+                <a:solidFill>
+                  <a:srgbClr val="CDD8EC"/>
+                </a:solidFill>
+                <a:latin typeface="Microsoft JhengHei" pitchFamily="34" charset="0"/>
+                <a:ea typeface="Microsoft JhengHei" pitchFamily="34" charset="-122"/>
+                <a:cs typeface="Microsoft JhengHei" pitchFamily="34" charset="-120"/>
+              </a:rPr>
+              <a:t>公區與示範戶無線覆蓋</a:t>
+            </a:r>
+            <a:endParaRPr lang="en-US" sz="820" dirty="0"/>
+          </a:p>
+        </p:txBody>
+      </p:sp>
+      <p:sp>
+        <p:nvSpPr>
+          <p:cNvPr id="54" name="Text 52"/>
+          <p:cNvSpPr/>
+          <p:nvPr/>
+        </p:nvSpPr>
+        <p:spPr>
+          <a:xfrm>
+            <a:off x="6364224" y="4718304"/>
+            <a:ext cx="2414016" cy="219456"/>
+          </a:xfrm>
+          <a:prstGeom prst="rect">
+            <a:avLst/>
+          </a:prstGeom>
+          <a:noFill/>
+          <a:ln/>
+        </p:spPr>
+        <p:txBody>
+          <a:bodyPr wrap="square" lIns="0" tIns="0" rIns="0" bIns="0" rtlCol="0" anchor="ctr"/>
+          <a:lstStyle/>
+          <a:p>
+            <a:pPr indent="0" marL="0">
+              <a:buNone/>
+            </a:pPr>
+            <a:r>
+              <a:rPr lang="en-US" sz="1000" dirty="0">
+                <a:solidFill>
+                  <a:srgbClr val="6FB1FF"/>
+                </a:solidFill>
+                <a:latin typeface="Microsoft JhengHei" pitchFamily="34" charset="0"/>
+                <a:ea typeface="Microsoft JhengHei" pitchFamily="34" charset="-122"/>
+                <a:cs typeface="Microsoft JhengHei" pitchFamily="34" charset="-120"/>
+              </a:rPr>
+              <a:t>○ </a:t>
+            </a:r>
+            <a:pPr indent="0" marL="0">
+              <a:buNone/>
+            </a:pPr>
+            <a:r>
+              <a:rPr lang="en-US" sz="1030" b="1" dirty="0">
+                <a:solidFill>
+                  <a:srgbClr val="F6F3EC"/>
+                </a:solidFill>
+                <a:latin typeface="Microsoft JhengHei" pitchFamily="34" charset="0"/>
+                <a:ea typeface="Microsoft JhengHei" pitchFamily="34" charset="-122"/>
+                <a:cs typeface="Microsoft JhengHei" pitchFamily="34" charset="-120"/>
+              </a:rPr>
+              <a:t>協定橋接模組</a:t>
+            </a:r>
+            <a:endParaRPr lang="en-US" sz="1000" dirty="0"/>
+          </a:p>
+        </p:txBody>
+      </p:sp>
+      <p:sp>
+        <p:nvSpPr>
+          <p:cNvPr id="55" name="Text 53"/>
+          <p:cNvSpPr/>
+          <p:nvPr/>
+        </p:nvSpPr>
+        <p:spPr>
+          <a:xfrm>
+            <a:off x="6565392" y="4937760"/>
+            <a:ext cx="2212848" cy="347472"/>
+          </a:xfrm>
+          <a:prstGeom prst="rect">
+            <a:avLst/>
+          </a:prstGeom>
+          <a:noFill/>
+          <a:ln/>
+        </p:spPr>
+        <p:txBody>
+          <a:bodyPr wrap="square" lIns="0" tIns="0" rIns="0" bIns="0" rtlCol="0" anchor="t"/>
+          <a:lstStyle/>
+          <a:p>
+            <a:pPr indent="0" marL="0">
+              <a:lnSpc>
+                <a:spcPct val="98000"/>
+              </a:lnSpc>
+              <a:buNone/>
+            </a:pPr>
+            <a:r>
+              <a:rPr lang="en-US" sz="820" dirty="0">
+                <a:solidFill>
+                  <a:srgbClr val="CDD8EC"/>
+                </a:solidFill>
+                <a:latin typeface="Microsoft JhengHei" pitchFamily="34" charset="0"/>
+                <a:ea typeface="Microsoft JhengHei" pitchFamily="34" charset="-122"/>
+                <a:cs typeface="Microsoft JhengHei" pitchFamily="34" charset="-120"/>
+              </a:rPr>
+              <a:t>MQTT/Modbus 對接設備廠牌</a:t>
+            </a:r>
+            <a:endParaRPr lang="en-US" sz="820" dirty="0"/>
+          </a:p>
+        </p:txBody>
+      </p:sp>
+      <p:sp>
+        <p:nvSpPr>
+          <p:cNvPr id="56" name="Shape 54"/>
+          <p:cNvSpPr/>
+          <p:nvPr/>
+        </p:nvSpPr>
+        <p:spPr>
+          <a:xfrm>
+            <a:off x="6327648" y="5340096"/>
+            <a:ext cx="2450592" cy="329184"/>
+          </a:xfrm>
+          <a:prstGeom prst="roundRect">
+            <a:avLst>
+              <a:gd name="adj" fmla="val 19444"/>
+            </a:avLst>
+          </a:prstGeom>
+          <a:solidFill>
+            <a:srgbClr val="0E1A30">
+              <a:alpha val="90000"/>
+            </a:srgbClr>
+          </a:solidFill>
+          <a:ln w="7620">
             <a:solidFill>
               <a:srgbClr val="6FB1FF">
                 <a:alpha val="55000"/>
@@ -9301,14 +11152,14 @@
       </p:sp>
       <p:sp>
         <p:nvSpPr>
-          <p:cNvPr id="14" name="Text 11"/>
-          <p:cNvSpPr/>
-          <p:nvPr/>
-        </p:nvSpPr>
-        <p:spPr>
-          <a:xfrm>
-            <a:off x="822960" y="5431536"/>
-            <a:ext cx="3054096" cy="384048"/>
+          <p:cNvPr id="57" name="Text 55"/>
+          <p:cNvSpPr/>
+          <p:nvPr/>
+        </p:nvSpPr>
+        <p:spPr>
+          <a:xfrm>
+            <a:off x="6327648" y="5340096"/>
+            <a:ext cx="2450592" cy="329184"/>
           </a:xfrm>
           <a:prstGeom prst="rect">
             <a:avLst/>
@@ -9324,67 +11175,89 @@
               <a:buNone/>
             </a:pPr>
             <a:r>
-              <a:rPr lang="en-US" sz="950" dirty="0">
-                <a:solidFill>
-                  <a:srgbClr val="5E74A0"/>
-                </a:solidFill>
-                <a:latin typeface="Microsoft JhengHei" pitchFamily="34" charset="0"/>
-                <a:ea typeface="Microsoft JhengHei" pitchFamily="34" charset="-122"/>
-                <a:cs typeface="Microsoft JhengHei" pitchFamily="34" charset="-120"/>
-              </a:rPr>
-              <a:t>適用　</a:t>
-            </a:r>
+              <a:rPr lang="en-US" sz="900" b="1" dirty="0">
+                <a:solidFill>
+                  <a:srgbClr val="E6CF9A"/>
+                </a:solidFill>
+                <a:latin typeface="Microsoft JhengHei" pitchFamily="34" charset="0"/>
+                <a:ea typeface="Microsoft JhengHei" pitchFamily="34" charset="-122"/>
+                <a:cs typeface="Microsoft JhengHei" pitchFamily="34" charset="-120"/>
+              </a:rPr>
+              <a:t>住戶體驗集中在此階段</a:t>
+            </a:r>
+            <a:endParaRPr lang="en-US" sz="900" dirty="0"/>
+          </a:p>
+        </p:txBody>
+      </p:sp>
+      <p:sp>
+        <p:nvSpPr>
+          <p:cNvPr id="58" name="Text 56"/>
+          <p:cNvSpPr/>
+          <p:nvPr/>
+        </p:nvSpPr>
+        <p:spPr>
+          <a:xfrm>
+            <a:off x="8897112" y="1719072"/>
+            <a:ext cx="164592" cy="402336"/>
+          </a:xfrm>
+          <a:prstGeom prst="rect">
+            <a:avLst/>
+          </a:prstGeom>
+          <a:noFill/>
+          <a:ln/>
+        </p:spPr>
+        <p:txBody>
+          <a:bodyPr wrap="square" lIns="0" tIns="0" rIns="0" bIns="0" rtlCol="0" anchor="ctr"/>
+          <a:lstStyle/>
+          <a:p>
             <a:pPr algn="ctr" indent="0" marL="0">
               <a:buNone/>
             </a:pPr>
             <a:r>
-              <a:rPr lang="en-US" sz="1050" b="1" dirty="0">
-                <a:solidFill>
-                  <a:srgbClr val="E6CF9A"/>
-                </a:solidFill>
-                <a:latin typeface="Microsoft JhengHei" pitchFamily="34" charset="0"/>
-                <a:ea typeface="Microsoft JhengHei" pitchFamily="34" charset="-122"/>
-                <a:cs typeface="Microsoft JhengHei" pitchFamily="34" charset="-120"/>
-              </a:rPr>
-              <a:t>接待中心 · 樣品屋</a:t>
-            </a:r>
-            <a:endParaRPr lang="en-US" sz="950" dirty="0"/>
-          </a:p>
-        </p:txBody>
-      </p:sp>
-      <p:sp>
-        <p:nvSpPr>
-          <p:cNvPr id="15" name="Shape 12"/>
-          <p:cNvSpPr/>
-          <p:nvPr/>
-        </p:nvSpPr>
-        <p:spPr>
-          <a:xfrm>
-            <a:off x="4379976" y="1700784"/>
-            <a:ext cx="3566160" cy="4297680"/>
+              <a:rPr lang="en-US" sz="1300" b="1" dirty="0">
+                <a:solidFill>
+                  <a:srgbClr val="C9A35A"/>
+                </a:solidFill>
+              </a:rPr>
+              <a:t>→</a:t>
+            </a:r>
+            <a:endParaRPr lang="en-US" sz="1300" dirty="0"/>
+          </a:p>
+        </p:txBody>
+      </p:sp>
+      <p:sp>
+        <p:nvSpPr>
+          <p:cNvPr id="59" name="Shape 57"/>
+          <p:cNvSpPr/>
+          <p:nvPr/>
+        </p:nvSpPr>
+        <p:spPr>
+          <a:xfrm>
+            <a:off x="9034272" y="1572768"/>
+            <a:ext cx="2743200" cy="4224528"/>
           </a:xfrm>
           <a:prstGeom prst="roundRect">
             <a:avLst>
-              <a:gd name="adj" fmla="val 3077"/>
+              <a:gd name="adj" fmla="val 3667"/>
             </a:avLst>
           </a:prstGeom>
           <a:solidFill>
             <a:srgbClr val="12203A">
-              <a:alpha val="82000"/>
+              <a:alpha val="80000"/>
             </a:srgbClr>
           </a:solidFill>
           <a:ln w="9525">
             <a:solidFill>
               <a:srgbClr val="C9A35A">
-                <a:alpha val="45000"/>
+                <a:alpha val="42000"/>
               </a:srgbClr>
             </a:solidFill>
             <a:prstDash val="solid"/>
           </a:ln>
           <a:effectLst>
-            <a:outerShdw sx="100000" sy="100000" kx="0" ky="0" algn="bl" rotWithShape="0" blurRad="114300" dist="38100" dir="5400000">
+            <a:outerShdw sx="100000" sy="100000" kx="0" ky="0" algn="bl" rotWithShape="0" blurRad="101600" dist="38100" dir="5400000">
               <a:srgbClr val="000000">
-                <a:alpha val="32000"/>
+                <a:alpha val="30000"/>
               </a:srgbClr>
             </a:outerShdw>
           </a:effectLst>
@@ -9392,65 +11265,39 @@
       </p:sp>
       <p:sp>
         <p:nvSpPr>
-          <p:cNvPr id="16" name="Shape 13"/>
-          <p:cNvSpPr/>
-          <p:nvPr/>
-        </p:nvSpPr>
-        <p:spPr>
-          <a:xfrm>
-            <a:off x="5760720" y="2011680"/>
-            <a:ext cx="804672" cy="804672"/>
+          <p:cNvPr id="60" name="Shape 58"/>
+          <p:cNvSpPr/>
+          <p:nvPr/>
+        </p:nvSpPr>
+        <p:spPr>
+          <a:xfrm>
+            <a:off x="9235440" y="1719072"/>
+            <a:ext cx="402336" cy="402336"/>
           </a:xfrm>
           <a:prstGeom prst="ellipse">
             <a:avLst/>
           </a:prstGeom>
           <a:solidFill>
-            <a:srgbClr val="0F1C33"/>
+            <a:srgbClr val="E6CF9A"/>
           </a:solidFill>
-          <a:ln w="12700">
+          <a:ln w="15240">
             <a:solidFill>
-              <a:srgbClr val="C9A35A">
-                <a:alpha val="75000"/>
-              </a:srgbClr>
+              <a:srgbClr val="0B1220"/>
             </a:solidFill>
             <a:prstDash val="solid"/>
           </a:ln>
         </p:spPr>
       </p:sp>
-      <p:pic>
-        <p:nvPicPr>
-          <p:cNvPr id="17" name="Image 1" descr="preencoded.png">    </p:cNvPr>
-          <p:cNvPicPr>
-            <a:picLocks noChangeAspect="1"/>
-          </p:cNvPicPr>
-          <p:nvPr/>
-        </p:nvPicPr>
-        <p:blipFill>
-          <a:blip r:embed="rId3"/>
-          <a:stretch>
-            <a:fillRect/>
-          </a:stretch>
-        </p:blipFill>
-        <p:spPr>
-          <a:xfrm>
-            <a:off x="5943600" y="2194560"/>
-            <a:ext cx="438912" cy="438912"/>
-          </a:xfrm>
-          <a:prstGeom prst="rect">
-            <a:avLst/>
-          </a:prstGeom>
-        </p:spPr>
-      </p:pic>
-      <p:sp>
-        <p:nvSpPr>
-          <p:cNvPr id="18" name="Text 14"/>
-          <p:cNvSpPr/>
-          <p:nvPr/>
-        </p:nvSpPr>
-        <p:spPr>
-          <a:xfrm>
-            <a:off x="4379976" y="2889504"/>
-            <a:ext cx="3566160" cy="420624"/>
+      <p:sp>
+        <p:nvSpPr>
+          <p:cNvPr id="61" name="Text 59"/>
+          <p:cNvSpPr/>
+          <p:nvPr/>
+        </p:nvSpPr>
+        <p:spPr>
+          <a:xfrm>
+            <a:off x="9235440" y="1719072"/>
+            <a:ext cx="402336" cy="402336"/>
           </a:xfrm>
           <a:prstGeom prst="rect">
             <a:avLst/>
@@ -9466,7 +11313,46 @@
               <a:buNone/>
             </a:pPr>
             <a:r>
-              <a:rPr lang="en-US" sz="2400" b="1" dirty="0">
+              <a:rPr lang="en-US" sz="1150" b="1" dirty="0">
+                <a:solidFill>
+                  <a:srgbClr val="0B1220"/>
+                </a:solidFill>
+              </a:rPr>
+              <a:t>P3</a:t>
+            </a:r>
+            <a:endParaRPr lang="en-US" sz="1150" dirty="0"/>
+          </a:p>
+        </p:txBody>
+      </p:sp>
+      <p:sp>
+        <p:nvSpPr>
+          <p:cNvPr id="62" name="Text 60"/>
+          <p:cNvSpPr/>
+          <p:nvPr/>
+        </p:nvSpPr>
+        <p:spPr>
+          <a:xfrm>
+            <a:off x="9729216" y="1682496"/>
+            <a:ext cx="1920240" cy="493776"/>
+          </a:xfrm>
+          <a:prstGeom prst="rect">
+            <a:avLst/>
+          </a:prstGeom>
+          <a:noFill/>
+          <a:ln/>
+        </p:spPr>
+        <p:txBody>
+          <a:bodyPr wrap="square" lIns="0" tIns="0" rIns="0" bIns="0" rtlCol="0" anchor="ctr"/>
+          <a:lstStyle/>
+          <a:p>
+            <a:pPr indent="0" marL="0">
+              <a:lnSpc>
+                <a:spcPct val="100000"/>
+              </a:lnSpc>
+              <a:buNone/>
+            </a:pPr>
+            <a:r>
+              <a:rPr lang="en-US" sz="1250" b="1" dirty="0">
                 <a:solidFill>
                   <a:srgbClr val="F6F3EC"/>
                 </a:solidFill>
@@ -9474,70 +11360,49 @@
                 <a:ea typeface="Microsoft JhengHei" pitchFamily="34" charset="-122"/>
                 <a:cs typeface="Microsoft JhengHei" pitchFamily="34" charset="-120"/>
               </a:rPr>
-              <a:t>標準版</a:t>
-            </a:r>
-            <a:endParaRPr lang="en-US" sz="2400" dirty="0"/>
-          </a:p>
-        </p:txBody>
-      </p:sp>
-      <p:sp>
-        <p:nvSpPr>
-          <p:cNvPr id="19" name="Text 15"/>
-          <p:cNvSpPr/>
-          <p:nvPr/>
-        </p:nvSpPr>
-        <p:spPr>
-          <a:xfrm>
-            <a:off x="4379976" y="3346704"/>
-            <a:ext cx="3566160" cy="256032"/>
-          </a:xfrm>
-          <a:prstGeom prst="rect">
-            <a:avLst/>
-          </a:prstGeom>
-          <a:noFill/>
-          <a:ln/>
-        </p:spPr>
-        <p:txBody>
-          <a:bodyPr wrap="square" lIns="0" tIns="0" rIns="0" bIns="0" rtlCol="0" anchor="ctr"/>
-          <a:lstStyle/>
-          <a:p>
-            <a:pPr algn="ctr" indent="0" marL="0">
-              <a:buNone/>
-            </a:pPr>
-            <a:r>
-              <a:rPr lang="en-US" sz="1100" b="1" spc="100" kern="0" dirty="0">
-                <a:solidFill>
-                  <a:srgbClr val="C9A35A"/>
-                </a:solidFill>
-                <a:latin typeface="Microsoft JhengHei" pitchFamily="34" charset="0"/>
-                <a:ea typeface="Microsoft JhengHei" pitchFamily="34" charset="-122"/>
-                <a:cs typeface="Microsoft JhengHei" pitchFamily="34" charset="-120"/>
-              </a:rPr>
-              <a:t>Standard · 單棟上線</a:t>
-            </a:r>
-            <a:endParaRPr lang="en-US" sz="1100" dirty="0"/>
-          </a:p>
-        </p:txBody>
-      </p:sp>
-      <p:sp>
-        <p:nvSpPr>
-          <p:cNvPr id="20" name="Shape 16"/>
-          <p:cNvSpPr/>
-          <p:nvPr/>
-        </p:nvSpPr>
-        <p:spPr>
-          <a:xfrm>
-            <a:off x="4837176" y="3675888"/>
-            <a:ext cx="2651760" cy="0"/>
+              <a:t>旗艦完善
+</a:t>
+            </a:r>
+            <a:pPr indent="0" marL="0">
+              <a:lnSpc>
+                <a:spcPct val="100000"/>
+              </a:lnSpc>
+              <a:buNone/>
+            </a:pPr>
+            <a:r>
+              <a:rPr lang="en-US" sz="900" b="1" spc="100" kern="0" dirty="0">
+                <a:solidFill>
+                  <a:srgbClr val="E6CF9A"/>
+                </a:solidFill>
+                <a:latin typeface="Microsoft JhengHei" pitchFamily="34" charset="0"/>
+                <a:ea typeface="Microsoft JhengHei" pitchFamily="34" charset="-122"/>
+                <a:cs typeface="Microsoft JhengHei" pitchFamily="34" charset="-120"/>
+              </a:rPr>
+              <a:t>營運成熟期</a:t>
+            </a:r>
+            <a:endParaRPr lang="en-US" sz="1250" dirty="0"/>
+          </a:p>
+        </p:txBody>
+      </p:sp>
+      <p:sp>
+        <p:nvSpPr>
+          <p:cNvPr id="63" name="Shape 61"/>
+          <p:cNvSpPr/>
+          <p:nvPr/>
+        </p:nvSpPr>
+        <p:spPr>
+          <a:xfrm>
+            <a:off x="9217152" y="2267712"/>
+            <a:ext cx="2377440" cy="0"/>
           </a:xfrm>
           <a:prstGeom prst="line">
             <a:avLst/>
           </a:prstGeom>
           <a:noFill/>
-          <a:ln w="6350">
+          <a:ln w="7620">
             <a:solidFill>
-              <a:srgbClr val="C9A35A">
-                <a:alpha val="50000"/>
+              <a:srgbClr val="E6CF9A">
+                <a:alpha val="60000"/>
               </a:srgbClr>
             </a:solidFill>
             <a:prstDash val="dash"/>
@@ -9546,14 +11411,67 @@
       </p:sp>
       <p:sp>
         <p:nvSpPr>
-          <p:cNvPr id="21" name="Text 17"/>
-          <p:cNvSpPr/>
-          <p:nvPr/>
-        </p:nvSpPr>
-        <p:spPr>
-          <a:xfrm>
-            <a:off x="4709160" y="3803904"/>
-            <a:ext cx="2999232" cy="1554480"/>
+          <p:cNvPr id="64" name="Text 62"/>
+          <p:cNvSpPr/>
+          <p:nvPr/>
+        </p:nvSpPr>
+        <p:spPr>
+          <a:xfrm>
+            <a:off x="9217152" y="2377440"/>
+            <a:ext cx="2414016" cy="219456"/>
+          </a:xfrm>
+          <a:prstGeom prst="rect">
+            <a:avLst/>
+          </a:prstGeom>
+          <a:noFill/>
+          <a:ln/>
+        </p:spPr>
+        <p:txBody>
+          <a:bodyPr wrap="square" lIns="0" tIns="0" rIns="0" bIns="0" rtlCol="0" anchor="ctr"/>
+          <a:lstStyle/>
+          <a:p>
+            <a:pPr indent="0" marL="0">
+              <a:buNone/>
+            </a:pPr>
+            <a:r>
+              <a:rPr lang="en-US" sz="1000" dirty="0">
+                <a:solidFill>
+                  <a:srgbClr val="6FB1FF"/>
+                </a:solidFill>
+                <a:latin typeface="Microsoft JhengHei" pitchFamily="34" charset="0"/>
+                <a:ea typeface="Microsoft JhengHei" pitchFamily="34" charset="-122"/>
+                <a:cs typeface="Microsoft JhengHei" pitchFamily="34" charset="-120"/>
+              </a:rPr>
+              <a:t>○ </a:t>
+            </a:r>
+            <a:pPr indent="0" marL="0">
+              <a:buNone/>
+            </a:pPr>
+            <a:r>
+              <a:rPr lang="en-US" sz="1030" b="1" dirty="0">
+                <a:solidFill>
+                  <a:srgbClr val="F6F3EC"/>
+                </a:solidFill>
+                <a:latin typeface="Microsoft JhengHei" pitchFamily="34" charset="0"/>
+                <a:ea typeface="Microsoft JhengHei" pitchFamily="34" charset="-122"/>
+                <a:cs typeface="Microsoft JhengHei" pitchFamily="34" charset="-120"/>
+              </a:rPr>
+              <a:t>車牌辨識柵欄(LPR)</a:t>
+            </a:r>
+            <a:endParaRPr lang="en-US" sz="1000" dirty="0"/>
+          </a:p>
+        </p:txBody>
+      </p:sp>
+      <p:sp>
+        <p:nvSpPr>
+          <p:cNvPr id="65" name="Text 63"/>
+          <p:cNvSpPr/>
+          <p:nvPr/>
+        </p:nvSpPr>
+        <p:spPr>
+          <a:xfrm>
+            <a:off x="9418320" y="2596896"/>
+            <a:ext cx="2212848" cy="347472"/>
           </a:xfrm>
           <a:prstGeom prst="rect">
             <a:avLst/>
@@ -9565,18 +11483,14 @@
           <a:bodyPr wrap="square" lIns="0" tIns="0" rIns="0" bIns="0" rtlCol="0" anchor="t"/>
           <a:lstStyle/>
           <a:p>
-            <a:pPr marL="177800" indent="-177800">
+            <a:pPr indent="0" marL="0">
               <a:lnSpc>
-                <a:spcPct val="105000"/>
+                <a:spcPct val="98000"/>
               </a:lnSpc>
-              <a:spcAft>
-                <a:spcPts val="800"/>
-              </a:spcAft>
-              <a:buSzPct val="100000"/>
-              <a:buChar char="•"/>
-            </a:pPr>
-            <a:r>
-              <a:rPr lang="en-US" sz="1100" dirty="0">
+              <a:buNone/>
+            </a:pPr>
+            <a:r>
+              <a:rPr lang="en-US" sz="820" dirty="0">
                 <a:solidFill>
                   <a:srgbClr val="CDD8EC"/>
                 </a:solidFill>
@@ -9584,23 +11498,94 @@
                 <a:ea typeface="Microsoft JhengHei" pitchFamily="34" charset="-122"/>
                 <a:cs typeface="Microsoft JhengHei" pitchFamily="34" charset="-120"/>
               </a:rPr>
-              <a:t>邊緣閘道主機 + UPS</a:t>
-            </a:r>
-            <a:endParaRPr lang="en-US" sz="1100" dirty="0"/>
-          </a:p>
-          <a:p>
-            <a:pPr marL="177800" indent="-177800">
+              <a:t>住戶車自動放行</a:t>
+            </a:r>
+            <a:endParaRPr lang="en-US" sz="820" dirty="0"/>
+          </a:p>
+        </p:txBody>
+      </p:sp>
+      <p:sp>
+        <p:nvSpPr>
+          <p:cNvPr id="66" name="Text 64"/>
+          <p:cNvSpPr/>
+          <p:nvPr/>
+        </p:nvSpPr>
+        <p:spPr>
+          <a:xfrm>
+            <a:off x="9217152" y="2962656"/>
+            <a:ext cx="2414016" cy="219456"/>
+          </a:xfrm>
+          <a:prstGeom prst="rect">
+            <a:avLst/>
+          </a:prstGeom>
+          <a:noFill/>
+          <a:ln/>
+        </p:spPr>
+        <p:txBody>
+          <a:bodyPr wrap="square" lIns="0" tIns="0" rIns="0" bIns="0" rtlCol="0" anchor="ctr"/>
+          <a:lstStyle/>
+          <a:p>
+            <a:pPr indent="0" marL="0">
+              <a:buNone/>
+            </a:pPr>
+            <a:r>
+              <a:rPr lang="en-US" sz="1000" dirty="0">
+                <a:solidFill>
+                  <a:srgbClr val="6FB1FF"/>
+                </a:solidFill>
+                <a:latin typeface="Microsoft JhengHei" pitchFamily="34" charset="0"/>
+                <a:ea typeface="Microsoft JhengHei" pitchFamily="34" charset="-122"/>
+                <a:cs typeface="Microsoft JhengHei" pitchFamily="34" charset="-120"/>
+              </a:rPr>
+              <a:t>○ </a:t>
+            </a:r>
+            <a:pPr indent="0" marL="0">
+              <a:buNone/>
+            </a:pPr>
+            <a:r>
+              <a:rPr lang="en-US" sz="1030" b="1" dirty="0">
+                <a:solidFill>
+                  <a:srgbClr val="F6F3EC"/>
+                </a:solidFill>
+                <a:latin typeface="Microsoft JhengHei" pitchFamily="34" charset="0"/>
+                <a:ea typeface="Microsoft JhengHei" pitchFamily="34" charset="-122"/>
+                <a:cs typeface="Microsoft JhengHei" pitchFamily="34" charset="-120"/>
+              </a:rPr>
+              <a:t>智能包裹櫃</a:t>
+            </a:r>
+            <a:endParaRPr lang="en-US" sz="1000" dirty="0"/>
+          </a:p>
+        </p:txBody>
+      </p:sp>
+      <p:sp>
+        <p:nvSpPr>
+          <p:cNvPr id="67" name="Text 65"/>
+          <p:cNvSpPr/>
+          <p:nvPr/>
+        </p:nvSpPr>
+        <p:spPr>
+          <a:xfrm>
+            <a:off x="9418320" y="3182112"/>
+            <a:ext cx="2212848" cy="347472"/>
+          </a:xfrm>
+          <a:prstGeom prst="rect">
+            <a:avLst/>
+          </a:prstGeom>
+          <a:noFill/>
+          <a:ln/>
+        </p:spPr>
+        <p:txBody>
+          <a:bodyPr wrap="square" lIns="0" tIns="0" rIns="0" bIns="0" rtlCol="0" anchor="t"/>
+          <a:lstStyle/>
+          <a:p>
+            <a:pPr indent="0" marL="0">
               <a:lnSpc>
-                <a:spcPct val="105000"/>
+                <a:spcPct val="98000"/>
               </a:lnSpc>
-              <a:spcAft>
-                <a:spcPts val="800"/>
-              </a:spcAft>
-              <a:buSzPct val="100000"/>
-              <a:buChar char="•"/>
-            </a:pPr>
-            <a:r>
-              <a:rPr lang="en-US" sz="1100" dirty="0">
+              <a:buNone/>
+            </a:pPr>
+            <a:r>
+              <a:rPr lang="en-US" sz="820" dirty="0">
                 <a:solidFill>
                   <a:srgbClr val="CDD8EC"/>
                 </a:solidFill>
@@ -9608,23 +11593,94 @@
                 <a:ea typeface="Microsoft JhengHei" pitchFamily="34" charset="-122"/>
                 <a:cs typeface="Microsoft JhengHei" pitchFamily="34" charset="-120"/>
               </a:rPr>
-              <a:t>網路:路由/防火牆 · PoE · AP</a:t>
-            </a:r>
-            <a:endParaRPr lang="en-US" sz="1100" dirty="0"/>
-          </a:p>
-          <a:p>
-            <a:pPr marL="177800" indent="-177800">
+              <a:t>自助取件免排隊</a:t>
+            </a:r>
+            <a:endParaRPr lang="en-US" sz="820" dirty="0"/>
+          </a:p>
+        </p:txBody>
+      </p:sp>
+      <p:sp>
+        <p:nvSpPr>
+          <p:cNvPr id="68" name="Text 66"/>
+          <p:cNvSpPr/>
+          <p:nvPr/>
+        </p:nvSpPr>
+        <p:spPr>
+          <a:xfrm>
+            <a:off x="9217152" y="3547872"/>
+            <a:ext cx="2414016" cy="219456"/>
+          </a:xfrm>
+          <a:prstGeom prst="rect">
+            <a:avLst/>
+          </a:prstGeom>
+          <a:noFill/>
+          <a:ln/>
+        </p:spPr>
+        <p:txBody>
+          <a:bodyPr wrap="square" lIns="0" tIns="0" rIns="0" bIns="0" rtlCol="0" anchor="ctr"/>
+          <a:lstStyle/>
+          <a:p>
+            <a:pPr indent="0" marL="0">
+              <a:buNone/>
+            </a:pPr>
+            <a:r>
+              <a:rPr lang="en-US" sz="1000" dirty="0">
+                <a:solidFill>
+                  <a:srgbClr val="6FB1FF"/>
+                </a:solidFill>
+                <a:latin typeface="Microsoft JhengHei" pitchFamily="34" charset="0"/>
+                <a:ea typeface="Microsoft JhengHei" pitchFamily="34" charset="-122"/>
+                <a:cs typeface="Microsoft JhengHei" pitchFamily="34" charset="-120"/>
+              </a:rPr>
+              <a:t>○ </a:t>
+            </a:r>
+            <a:pPr indent="0" marL="0">
+              <a:buNone/>
+            </a:pPr>
+            <a:r>
+              <a:rPr lang="en-US" sz="1030" b="1" dirty="0">
+                <a:solidFill>
+                  <a:srgbClr val="F6F3EC"/>
+                </a:solidFill>
+                <a:latin typeface="Microsoft JhengHei" pitchFamily="34" charset="0"/>
+                <a:ea typeface="Microsoft JhengHei" pitchFamily="34" charset="-122"/>
+                <a:cs typeface="Microsoft JhengHei" pitchFamily="34" charset="-120"/>
+              </a:rPr>
+              <a:t>電梯介接控制器</a:t>
+            </a:r>
+            <a:endParaRPr lang="en-US" sz="1000" dirty="0"/>
+          </a:p>
+        </p:txBody>
+      </p:sp>
+      <p:sp>
+        <p:nvSpPr>
+          <p:cNvPr id="69" name="Text 67"/>
+          <p:cNvSpPr/>
+          <p:nvPr/>
+        </p:nvSpPr>
+        <p:spPr>
+          <a:xfrm>
+            <a:off x="9418320" y="3767328"/>
+            <a:ext cx="2212848" cy="347472"/>
+          </a:xfrm>
+          <a:prstGeom prst="rect">
+            <a:avLst/>
+          </a:prstGeom>
+          <a:noFill/>
+          <a:ln/>
+        </p:spPr>
+        <p:txBody>
+          <a:bodyPr wrap="square" lIns="0" tIns="0" rIns="0" bIns="0" rtlCol="0" anchor="t"/>
+          <a:lstStyle/>
+          <a:p>
+            <a:pPr indent="0" marL="0">
               <a:lnSpc>
-                <a:spcPct val="105000"/>
+                <a:spcPct val="98000"/>
               </a:lnSpc>
-              <a:spcAft>
-                <a:spcPts val="800"/>
-              </a:spcAft>
-              <a:buSzPct val="100000"/>
-              <a:buChar char="•"/>
-            </a:pPr>
-            <a:r>
-              <a:rPr lang="en-US" sz="1100" dirty="0">
+              <a:buNone/>
+            </a:pPr>
+            <a:r>
+              <a:rPr lang="en-US" sz="820" dirty="0">
                 <a:solidFill>
                   <a:srgbClr val="CDD8EC"/>
                 </a:solidFill>
@@ -9632,23 +11688,94 @@
                 <a:ea typeface="Microsoft JhengHei" pitchFamily="34" charset="-122"/>
                 <a:cs typeface="Microsoft JhengHei" pitchFamily="34" charset="-120"/>
               </a:rPr>
-              <a:t>大廳掃碼門禁 + 電梯介接</a:t>
-            </a:r>
-            <a:endParaRPr lang="en-US" sz="1100" dirty="0"/>
-          </a:p>
-          <a:p>
-            <a:pPr marL="177800" indent="-177800">
+              <a:t>乾接點/BACnet 呼梯</a:t>
+            </a:r>
+            <a:endParaRPr lang="en-US" sz="820" dirty="0"/>
+          </a:p>
+        </p:txBody>
+      </p:sp>
+      <p:sp>
+        <p:nvSpPr>
+          <p:cNvPr id="70" name="Text 68"/>
+          <p:cNvSpPr/>
+          <p:nvPr/>
+        </p:nvSpPr>
+        <p:spPr>
+          <a:xfrm>
+            <a:off x="9217152" y="4133088"/>
+            <a:ext cx="2414016" cy="219456"/>
+          </a:xfrm>
+          <a:prstGeom prst="rect">
+            <a:avLst/>
+          </a:prstGeom>
+          <a:noFill/>
+          <a:ln/>
+        </p:spPr>
+        <p:txBody>
+          <a:bodyPr wrap="square" lIns="0" tIns="0" rIns="0" bIns="0" rtlCol="0" anchor="ctr"/>
+          <a:lstStyle/>
+          <a:p>
+            <a:pPr indent="0" marL="0">
+              <a:buNone/>
+            </a:pPr>
+            <a:r>
+              <a:rPr lang="en-US" sz="1000" dirty="0">
+                <a:solidFill>
+                  <a:srgbClr val="6FB1FF"/>
+                </a:solidFill>
+                <a:latin typeface="Microsoft JhengHei" pitchFamily="34" charset="0"/>
+                <a:ea typeface="Microsoft JhengHei" pitchFamily="34" charset="-122"/>
+                <a:cs typeface="Microsoft JhengHei" pitchFamily="34" charset="-120"/>
+              </a:rPr>
+              <a:t>○ </a:t>
+            </a:r>
+            <a:pPr indent="0" marL="0">
+              <a:buNone/>
+            </a:pPr>
+            <a:r>
+              <a:rPr lang="en-US" sz="1030" b="1" dirty="0">
+                <a:solidFill>
+                  <a:srgbClr val="F6F3EC"/>
+                </a:solidFill>
+                <a:latin typeface="Microsoft JhengHei" pitchFamily="34" charset="0"/>
+                <a:ea typeface="Microsoft JhengHei" pitchFamily="34" charset="-122"/>
+                <a:cs typeface="Microsoft JhengHei" pitchFamily="34" charset="-120"/>
+              </a:rPr>
+              <a:t>Nest Hub Max 看板</a:t>
+            </a:r>
+            <a:endParaRPr lang="en-US" sz="1000" dirty="0"/>
+          </a:p>
+        </p:txBody>
+      </p:sp>
+      <p:sp>
+        <p:nvSpPr>
+          <p:cNvPr id="71" name="Text 69"/>
+          <p:cNvSpPr/>
+          <p:nvPr/>
+        </p:nvSpPr>
+        <p:spPr>
+          <a:xfrm>
+            <a:off x="9418320" y="4352544"/>
+            <a:ext cx="2212848" cy="347472"/>
+          </a:xfrm>
+          <a:prstGeom prst="rect">
+            <a:avLst/>
+          </a:prstGeom>
+          <a:noFill/>
+          <a:ln/>
+        </p:spPr>
+        <p:txBody>
+          <a:bodyPr wrap="square" lIns="0" tIns="0" rIns="0" bIns="0" rtlCol="0" anchor="t"/>
+          <a:lstStyle/>
+          <a:p>
+            <a:pPr indent="0" marL="0">
               <a:lnSpc>
-                <a:spcPct val="105000"/>
+                <a:spcPct val="98000"/>
               </a:lnSpc>
-              <a:spcAft>
-                <a:spcPts val="800"/>
-              </a:spcAft>
-              <a:buSzPct val="100000"/>
-              <a:buChar char="•"/>
-            </a:pPr>
-            <a:r>
-              <a:rPr lang="en-US" sz="1100" dirty="0">
+              <a:buNone/>
+            </a:pPr>
+            <a:r>
+              <a:rPr lang="en-US" sz="820" dirty="0">
                 <a:solidFill>
                   <a:srgbClr val="CDD8EC"/>
                 </a:solidFill>
@@ -9656,23 +11783,94 @@
                 <a:ea typeface="Microsoft JhengHei" pitchFamily="34" charset="-122"/>
                 <a:cs typeface="Microsoft JhengHei" pitchFamily="34" charset="-120"/>
               </a:rPr>
-              <a:t>住戶 IoT(光/空調/窗簾)</a:t>
-            </a:r>
-            <a:endParaRPr lang="en-US" sz="1100" dirty="0"/>
-          </a:p>
-          <a:p>
-            <a:pPr marL="177800" indent="-177800">
+              <a:t>公設迎賓/管理大屏</a:t>
+            </a:r>
+            <a:endParaRPr lang="en-US" sz="820" dirty="0"/>
+          </a:p>
+        </p:txBody>
+      </p:sp>
+      <p:sp>
+        <p:nvSpPr>
+          <p:cNvPr id="72" name="Text 70"/>
+          <p:cNvSpPr/>
+          <p:nvPr/>
+        </p:nvSpPr>
+        <p:spPr>
+          <a:xfrm>
+            <a:off x="9217152" y="4718304"/>
+            <a:ext cx="2414016" cy="219456"/>
+          </a:xfrm>
+          <a:prstGeom prst="rect">
+            <a:avLst/>
+          </a:prstGeom>
+          <a:noFill/>
+          <a:ln/>
+        </p:spPr>
+        <p:txBody>
+          <a:bodyPr wrap="square" lIns="0" tIns="0" rIns="0" bIns="0" rtlCol="0" anchor="ctr"/>
+          <a:lstStyle/>
+          <a:p>
+            <a:pPr indent="0" marL="0">
+              <a:buNone/>
+            </a:pPr>
+            <a:r>
+              <a:rPr lang="en-US" sz="1000" dirty="0">
+                <a:solidFill>
+                  <a:srgbClr val="6FB1FF"/>
+                </a:solidFill>
+                <a:latin typeface="Microsoft JhengHei" pitchFamily="34" charset="0"/>
+                <a:ea typeface="Microsoft JhengHei" pitchFamily="34" charset="-122"/>
+                <a:cs typeface="Microsoft JhengHei" pitchFamily="34" charset="-120"/>
+              </a:rPr>
+              <a:t>○ </a:t>
+            </a:r>
+            <a:pPr indent="0" marL="0">
+              <a:buNone/>
+            </a:pPr>
+            <a:r>
+              <a:rPr lang="en-US" sz="1030" b="1" dirty="0">
+                <a:solidFill>
+                  <a:srgbClr val="F6F3EC"/>
+                </a:solidFill>
+                <a:latin typeface="Microsoft JhengHei" pitchFamily="34" charset="0"/>
+                <a:ea typeface="Microsoft JhengHei" pitchFamily="34" charset="-122"/>
+                <a:cs typeface="Microsoft JhengHei" pitchFamily="34" charset="-120"/>
+              </a:rPr>
+              <a:t>自架 NLP + PG・雙備援</a:t>
+            </a:r>
+            <a:endParaRPr lang="en-US" sz="1000" dirty="0"/>
+          </a:p>
+        </p:txBody>
+      </p:sp>
+      <p:sp>
+        <p:nvSpPr>
+          <p:cNvPr id="73" name="Text 71"/>
+          <p:cNvSpPr/>
+          <p:nvPr/>
+        </p:nvSpPr>
+        <p:spPr>
+          <a:xfrm>
+            <a:off x="9418320" y="4937760"/>
+            <a:ext cx="2212848" cy="347472"/>
+          </a:xfrm>
+          <a:prstGeom prst="rect">
+            <a:avLst/>
+          </a:prstGeom>
+          <a:noFill/>
+          <a:ln/>
+        </p:spPr>
+        <p:txBody>
+          <a:bodyPr wrap="square" lIns="0" tIns="0" rIns="0" bIns="0" rtlCol="0" anchor="t"/>
+          <a:lstStyle/>
+          <a:p>
+            <a:pPr indent="0" marL="0">
               <a:lnSpc>
-                <a:spcPct val="105000"/>
+                <a:spcPct val="98000"/>
               </a:lnSpc>
-              <a:spcAft>
-                <a:spcPts val="800"/>
-              </a:spcAft>
-              <a:buSzPct val="100000"/>
-              <a:buChar char="•"/>
-            </a:pPr>
-            <a:r>
-              <a:rPr lang="en-US" sz="1100" dirty="0">
+              <a:buNone/>
+            </a:pPr>
+            <a:r>
+              <a:rPr lang="en-US" sz="820" dirty="0">
                 <a:solidFill>
                   <a:srgbClr val="CDD8EC"/>
                 </a:solidFill>
@@ -9680,26 +11878,26 @@
                 <a:ea typeface="Microsoft JhengHei" pitchFamily="34" charset="-122"/>
                 <a:cs typeface="Microsoft JhengHei" pitchFamily="34" charset="-120"/>
               </a:rPr>
-              <a:t>雲端升級:Render Starter(持久碟)</a:t>
-            </a:r>
-            <a:endParaRPr lang="en-US" sz="1100" dirty="0"/>
-          </a:p>
-        </p:txBody>
-      </p:sp>
-      <p:sp>
-        <p:nvSpPr>
-          <p:cNvPr id="22" name="Shape 18"/>
-          <p:cNvSpPr/>
-          <p:nvPr/>
-        </p:nvSpPr>
-        <p:spPr>
-          <a:xfrm>
-            <a:off x="4636008" y="5431536"/>
-            <a:ext cx="3054096" cy="384048"/>
+              <a:t>資料自主 + 旗艦可用性</a:t>
+            </a:r>
+            <a:endParaRPr lang="en-US" sz="820" dirty="0"/>
+          </a:p>
+        </p:txBody>
+      </p:sp>
+      <p:sp>
+        <p:nvSpPr>
+          <p:cNvPr id="74" name="Shape 72"/>
+          <p:cNvSpPr/>
+          <p:nvPr/>
+        </p:nvSpPr>
+        <p:spPr>
+          <a:xfrm>
+            <a:off x="9180576" y="5340096"/>
+            <a:ext cx="2450592" cy="329184"/>
           </a:xfrm>
           <a:prstGeom prst="roundRect">
             <a:avLst>
-              <a:gd name="adj" fmla="val 19048"/>
+              <a:gd name="adj" fmla="val 19444"/>
             </a:avLst>
           </a:prstGeom>
           <a:solidFill>
@@ -9707,9 +11905,9 @@
               <a:alpha val="90000"/>
             </a:srgbClr>
           </a:solidFill>
-          <a:ln w="9525">
+          <a:ln w="7620">
             <a:solidFill>
-              <a:srgbClr val="C9A35A">
+              <a:srgbClr val="E6CF9A">
                 <a:alpha val="55000"/>
               </a:srgbClr>
             </a:solidFill>
@@ -9719,14 +11917,14 @@
       </p:sp>
       <p:sp>
         <p:nvSpPr>
-          <p:cNvPr id="23" name="Text 19"/>
-          <p:cNvSpPr/>
-          <p:nvPr/>
-        </p:nvSpPr>
-        <p:spPr>
-          <a:xfrm>
-            <a:off x="4636008" y="5431536"/>
-            <a:ext cx="3054096" cy="384048"/>
+          <p:cNvPr id="75" name="Text 73"/>
+          <p:cNvSpPr/>
+          <p:nvPr/>
+        </p:nvSpPr>
+        <p:spPr>
+          <a:xfrm>
+            <a:off x="9180576" y="5340096"/>
+            <a:ext cx="2450592" cy="329184"/>
           </a:xfrm>
           <a:prstGeom prst="rect">
             <a:avLst/>
@@ -9742,7 +11940,46 @@
               <a:buNone/>
             </a:pPr>
             <a:r>
-              <a:rPr lang="en-US" sz="950" dirty="0">
+              <a:rPr lang="en-US" sz="900" b="1" dirty="0">
+                <a:solidFill>
+                  <a:srgbClr val="E6CF9A"/>
+                </a:solidFill>
+                <a:latin typeface="Microsoft JhengHei" pitchFamily="34" charset="0"/>
+                <a:ea typeface="Microsoft JhengHei" pitchFamily="34" charset="-122"/>
+                <a:cs typeface="Microsoft JhengHei" pitchFamily="34" charset="-120"/>
+              </a:rPr>
+              <a:t>全數選配,逐項導入</a:t>
+            </a:r>
+            <a:endParaRPr lang="en-US" sz="900" dirty="0"/>
+          </a:p>
+        </p:txBody>
+      </p:sp>
+      <p:sp>
+        <p:nvSpPr>
+          <p:cNvPr id="76" name="Text 74"/>
+          <p:cNvSpPr/>
+          <p:nvPr/>
+        </p:nvSpPr>
+        <p:spPr>
+          <a:xfrm>
+            <a:off x="475488" y="6144768"/>
+            <a:ext cx="11247120" cy="274320"/>
+          </a:xfrm>
+          <a:prstGeom prst="rect">
+            <a:avLst/>
+          </a:prstGeom>
+          <a:noFill/>
+          <a:ln/>
+        </p:spPr>
+        <p:txBody>
+          <a:bodyPr wrap="square" lIns="0" tIns="0" rIns="0" bIns="0" rtlCol="0" anchor="ctr"/>
+          <a:lstStyle/>
+          <a:p>
+            <a:pPr indent="0" marL="0">
+              <a:buNone/>
+            </a:pPr>
+            <a:r>
+              <a:rPr lang="en-US" sz="1000" i="1" dirty="0">
                 <a:solidFill>
                   <a:srgbClr val="5E74A0"/>
                 </a:solidFill>
@@ -9750,478 +11987,7 @@
                 <a:ea typeface="Microsoft JhengHei" pitchFamily="34" charset="-122"/>
                 <a:cs typeface="Microsoft JhengHei" pitchFamily="34" charset="-120"/>
               </a:rPr>
-              <a:t>適用　</a:t>
-            </a:r>
-            <a:pPr algn="ctr" indent="0" marL="0">
-              <a:buNone/>
-            </a:pPr>
-            <a:r>
-              <a:rPr lang="en-US" sz="1050" b="1" dirty="0">
-                <a:solidFill>
-                  <a:srgbClr val="E6CF9A"/>
-                </a:solidFill>
-                <a:latin typeface="Microsoft JhengHei" pitchFamily="34" charset="0"/>
-                <a:ea typeface="Microsoft JhengHei" pitchFamily="34" charset="-122"/>
-                <a:cs typeface="Microsoft JhengHei" pitchFamily="34" charset="-120"/>
-              </a:rPr>
-              <a:t>單棟社區正式營運</a:t>
-            </a:r>
-            <a:endParaRPr lang="en-US" sz="950" dirty="0"/>
-          </a:p>
-        </p:txBody>
-      </p:sp>
-      <p:sp>
-        <p:nvSpPr>
-          <p:cNvPr id="24" name="Shape 20"/>
-          <p:cNvSpPr/>
-          <p:nvPr/>
-        </p:nvSpPr>
-        <p:spPr>
-          <a:xfrm>
-            <a:off x="8193024" y="1700784"/>
-            <a:ext cx="3566160" cy="4297680"/>
-          </a:xfrm>
-          <a:prstGeom prst="roundRect">
-            <a:avLst>
-              <a:gd name="adj" fmla="val 3077"/>
-            </a:avLst>
-          </a:prstGeom>
-          <a:solidFill>
-            <a:srgbClr val="1A2942">
-              <a:alpha val="94000"/>
-            </a:srgbClr>
-          </a:solidFill>
-          <a:ln w="17780">
-            <a:solidFill>
-              <a:srgbClr val="C9A35A">
-                <a:alpha val="80000"/>
-              </a:srgbClr>
-            </a:solidFill>
-            <a:prstDash val="solid"/>
-          </a:ln>
-          <a:effectLst>
-            <a:outerShdw sx="100000" sy="100000" kx="0" ky="0" algn="bl" rotWithShape="0" blurRad="114300" dist="38100" dir="5400000">
-              <a:srgbClr val="000000">
-                <a:alpha val="32000"/>
-              </a:srgbClr>
-            </a:outerShdw>
-          </a:effectLst>
-        </p:spPr>
-      </p:sp>
-      <p:sp>
-        <p:nvSpPr>
-          <p:cNvPr id="25" name="Shape 21"/>
-          <p:cNvSpPr/>
-          <p:nvPr/>
-        </p:nvSpPr>
-        <p:spPr>
-          <a:xfrm>
-            <a:off x="9573768" y="2011680"/>
-            <a:ext cx="804672" cy="804672"/>
-          </a:xfrm>
-          <a:prstGeom prst="ellipse">
-            <a:avLst/>
-          </a:prstGeom>
-          <a:solidFill>
-            <a:srgbClr val="0F1C33"/>
-          </a:solidFill>
-          <a:ln w="12700">
-            <a:solidFill>
-              <a:srgbClr val="C9A35A">
-                <a:alpha val="75000"/>
-              </a:srgbClr>
-            </a:solidFill>
-            <a:prstDash val="solid"/>
-          </a:ln>
-        </p:spPr>
-      </p:sp>
-      <p:pic>
-        <p:nvPicPr>
-          <p:cNvPr id="26" name="Image 2" descr="preencoded.png">    </p:cNvPr>
-          <p:cNvPicPr>
-            <a:picLocks noChangeAspect="1"/>
-          </p:cNvPicPr>
-          <p:nvPr/>
-        </p:nvPicPr>
-        <p:blipFill>
-          <a:blip r:embed="rId4"/>
-          <a:stretch>
-            <a:fillRect/>
-          </a:stretch>
-        </p:blipFill>
-        <p:spPr>
-          <a:xfrm>
-            <a:off x="9756648" y="2194560"/>
-            <a:ext cx="438912" cy="438912"/>
-          </a:xfrm>
-          <a:prstGeom prst="rect">
-            <a:avLst/>
-          </a:prstGeom>
-        </p:spPr>
-      </p:pic>
-      <p:sp>
-        <p:nvSpPr>
-          <p:cNvPr id="27" name="Text 22"/>
-          <p:cNvSpPr/>
-          <p:nvPr/>
-        </p:nvSpPr>
-        <p:spPr>
-          <a:xfrm>
-            <a:off x="8193024" y="2889504"/>
-            <a:ext cx="3566160" cy="420624"/>
-          </a:xfrm>
-          <a:prstGeom prst="rect">
-            <a:avLst/>
-          </a:prstGeom>
-          <a:noFill/>
-          <a:ln/>
-        </p:spPr>
-        <p:txBody>
-          <a:bodyPr wrap="square" lIns="0" tIns="0" rIns="0" bIns="0" rtlCol="0" anchor="ctr"/>
-          <a:lstStyle/>
-          <a:p>
-            <a:pPr algn="ctr" indent="0" marL="0">
-              <a:buNone/>
-            </a:pPr>
-            <a:r>
-              <a:rPr lang="en-US" sz="2400" b="1" dirty="0">
-                <a:solidFill>
-                  <a:srgbClr val="F6F3EC"/>
-                </a:solidFill>
-                <a:latin typeface="Microsoft JhengHei" pitchFamily="34" charset="0"/>
-                <a:ea typeface="Microsoft JhengHei" pitchFamily="34" charset="-122"/>
-                <a:cs typeface="Microsoft JhengHei" pitchFamily="34" charset="-120"/>
-              </a:rPr>
-              <a:t>旗艦版</a:t>
-            </a:r>
-            <a:endParaRPr lang="en-US" sz="2400" dirty="0"/>
-          </a:p>
-        </p:txBody>
-      </p:sp>
-      <p:sp>
-        <p:nvSpPr>
-          <p:cNvPr id="28" name="Text 23"/>
-          <p:cNvSpPr/>
-          <p:nvPr/>
-        </p:nvSpPr>
-        <p:spPr>
-          <a:xfrm>
-            <a:off x="8193024" y="3346704"/>
-            <a:ext cx="3566160" cy="256032"/>
-          </a:xfrm>
-          <a:prstGeom prst="rect">
-            <a:avLst/>
-          </a:prstGeom>
-          <a:noFill/>
-          <a:ln/>
-        </p:spPr>
-        <p:txBody>
-          <a:bodyPr wrap="square" lIns="0" tIns="0" rIns="0" bIns="0" rtlCol="0" anchor="ctr"/>
-          <a:lstStyle/>
-          <a:p>
-            <a:pPr algn="ctr" indent="0" marL="0">
-              <a:buNone/>
-            </a:pPr>
-            <a:r>
-              <a:rPr lang="en-US" sz="1100" b="1" spc="100" kern="0" dirty="0">
-                <a:solidFill>
-                  <a:srgbClr val="C9A35A"/>
-                </a:solidFill>
-                <a:latin typeface="Microsoft JhengHei" pitchFamily="34" charset="0"/>
-                <a:ea typeface="Microsoft JhengHei" pitchFamily="34" charset="-122"/>
-                <a:cs typeface="Microsoft JhengHei" pitchFamily="34" charset="-120"/>
-              </a:rPr>
-              <a:t>Flagship · 多棟旗艦</a:t>
-            </a:r>
-            <a:endParaRPr lang="en-US" sz="1100" dirty="0"/>
-          </a:p>
-        </p:txBody>
-      </p:sp>
-      <p:sp>
-        <p:nvSpPr>
-          <p:cNvPr id="29" name="Shape 24"/>
-          <p:cNvSpPr/>
-          <p:nvPr/>
-        </p:nvSpPr>
-        <p:spPr>
-          <a:xfrm>
-            <a:off x="8650224" y="3675888"/>
-            <a:ext cx="2651760" cy="0"/>
-          </a:xfrm>
-          <a:prstGeom prst="line">
-            <a:avLst/>
-          </a:prstGeom>
-          <a:noFill/>
-          <a:ln w="6350">
-            <a:solidFill>
-              <a:srgbClr val="C9A35A">
-                <a:alpha val="50000"/>
-              </a:srgbClr>
-            </a:solidFill>
-            <a:prstDash val="dash"/>
-          </a:ln>
-        </p:spPr>
-      </p:sp>
-      <p:sp>
-        <p:nvSpPr>
-          <p:cNvPr id="30" name="Text 25"/>
-          <p:cNvSpPr/>
-          <p:nvPr/>
-        </p:nvSpPr>
-        <p:spPr>
-          <a:xfrm>
-            <a:off x="8522208" y="3803904"/>
-            <a:ext cx="2999232" cy="1554480"/>
-          </a:xfrm>
-          <a:prstGeom prst="rect">
-            <a:avLst/>
-          </a:prstGeom>
-          <a:noFill/>
-          <a:ln/>
-        </p:spPr>
-        <p:txBody>
-          <a:bodyPr wrap="square" lIns="0" tIns="0" rIns="0" bIns="0" rtlCol="0" anchor="t"/>
-          <a:lstStyle/>
-          <a:p>
-            <a:pPr marL="177800" indent="-177800">
-              <a:lnSpc>
-                <a:spcPct val="105000"/>
-              </a:lnSpc>
-              <a:spcAft>
-                <a:spcPts val="800"/>
-              </a:spcAft>
-              <a:buSzPct val="100000"/>
-              <a:buChar char="•"/>
-            </a:pPr>
-            <a:r>
-              <a:rPr lang="en-US" sz="1100" dirty="0">
-                <a:solidFill>
-                  <a:srgbClr val="CDD8EC"/>
-                </a:solidFill>
-                <a:latin typeface="Microsoft JhengHei" pitchFamily="34" charset="0"/>
-                <a:ea typeface="Microsoft JhengHei" pitchFamily="34" charset="-122"/>
-                <a:cs typeface="Microsoft JhengHei" pitchFamily="34" charset="-120"/>
-              </a:rPr>
-              <a:t>含『標準版』全部項目</a:t>
-            </a:r>
-            <a:endParaRPr lang="en-US" sz="1100" dirty="0"/>
-          </a:p>
-          <a:p>
-            <a:pPr marL="177800" indent="-177800">
-              <a:lnSpc>
-                <a:spcPct val="105000"/>
-              </a:lnSpc>
-              <a:spcAft>
-                <a:spcPts val="800"/>
-              </a:spcAft>
-              <a:buSzPct val="100000"/>
-              <a:buChar char="•"/>
-            </a:pPr>
-            <a:r>
-              <a:rPr lang="en-US" sz="1100" dirty="0">
-                <a:solidFill>
-                  <a:srgbClr val="CDD8EC"/>
-                </a:solidFill>
-                <a:latin typeface="Microsoft JhengHei" pitchFamily="34" charset="0"/>
-                <a:ea typeface="Microsoft JhengHei" pitchFamily="34" charset="-122"/>
-                <a:cs typeface="Microsoft JhengHei" pitchFamily="34" charset="-120"/>
-              </a:rPr>
-              <a:t>車牌辨識柵欄 + 智能包裹櫃</a:t>
-            </a:r>
-            <a:endParaRPr lang="en-US" sz="1100" dirty="0"/>
-          </a:p>
-          <a:p>
-            <a:pPr marL="177800" indent="-177800">
-              <a:lnSpc>
-                <a:spcPct val="105000"/>
-              </a:lnSpc>
-              <a:spcAft>
-                <a:spcPts val="800"/>
-              </a:spcAft>
-              <a:buSzPct val="100000"/>
-              <a:buChar char="•"/>
-            </a:pPr>
-            <a:r>
-              <a:rPr lang="en-US" sz="1100" dirty="0">
-                <a:solidFill>
-                  <a:srgbClr val="CDD8EC"/>
-                </a:solidFill>
-                <a:latin typeface="Microsoft JhengHei" pitchFamily="34" charset="0"/>
-                <a:ea typeface="Microsoft JhengHei" pitchFamily="34" charset="-122"/>
-                <a:cs typeface="Microsoft JhengHei" pitchFamily="34" charset="-120"/>
-              </a:rPr>
-              <a:t>全區 Nest Wifi Pro(6E)+ 協定橋接</a:t>
-            </a:r>
-            <a:endParaRPr lang="en-US" sz="1100" dirty="0"/>
-          </a:p>
-          <a:p>
-            <a:pPr marL="177800" indent="-177800">
-              <a:lnSpc>
-                <a:spcPct val="105000"/>
-              </a:lnSpc>
-              <a:spcAft>
-                <a:spcPts val="800"/>
-              </a:spcAft>
-              <a:buSzPct val="100000"/>
-              <a:buChar char="•"/>
-            </a:pPr>
-            <a:r>
-              <a:rPr lang="en-US" sz="1100" dirty="0">
-                <a:solidFill>
-                  <a:srgbClr val="CDD8EC"/>
-                </a:solidFill>
-                <a:latin typeface="Microsoft JhengHei" pitchFamily="34" charset="0"/>
-                <a:ea typeface="Microsoft JhengHei" pitchFamily="34" charset="-122"/>
-                <a:cs typeface="Microsoft JhengHei" pitchFamily="34" charset="-120"/>
-              </a:rPr>
-              <a:t>自架 NLP(FastAPI)+ PostgreSQL</a:t>
-            </a:r>
-            <a:endParaRPr lang="en-US" sz="1100" dirty="0"/>
-          </a:p>
-          <a:p>
-            <a:pPr marL="177800" indent="-177800">
-              <a:lnSpc>
-                <a:spcPct val="105000"/>
-              </a:lnSpc>
-              <a:spcAft>
-                <a:spcPts val="800"/>
-              </a:spcAft>
-              <a:buSzPct val="100000"/>
-              <a:buChar char="•"/>
-            </a:pPr>
-            <a:r>
-              <a:rPr lang="en-US" sz="1100" dirty="0">
-                <a:solidFill>
-                  <a:srgbClr val="CDD8EC"/>
-                </a:solidFill>
-                <a:latin typeface="Microsoft JhengHei" pitchFamily="34" charset="0"/>
-                <a:ea typeface="Microsoft JhengHei" pitchFamily="34" charset="-122"/>
-                <a:cs typeface="Microsoft JhengHei" pitchFamily="34" charset="-120"/>
-              </a:rPr>
-              <a:t>冗餘:雙 UPS / 雙上聯備援</a:t>
-            </a:r>
-            <a:endParaRPr lang="en-US" sz="1100" dirty="0"/>
-          </a:p>
-        </p:txBody>
-      </p:sp>
-      <p:sp>
-        <p:nvSpPr>
-          <p:cNvPr id="31" name="Shape 26"/>
-          <p:cNvSpPr/>
-          <p:nvPr/>
-        </p:nvSpPr>
-        <p:spPr>
-          <a:xfrm>
-            <a:off x="8449056" y="5431536"/>
-            <a:ext cx="3054096" cy="384048"/>
-          </a:xfrm>
-          <a:prstGeom prst="roundRect">
-            <a:avLst>
-              <a:gd name="adj" fmla="val 19048"/>
-            </a:avLst>
-          </a:prstGeom>
-          <a:solidFill>
-            <a:srgbClr val="0E1A30">
-              <a:alpha val="90000"/>
-            </a:srgbClr>
-          </a:solidFill>
-          <a:ln w="9525">
-            <a:solidFill>
-              <a:srgbClr val="C9A35A">
-                <a:alpha val="55000"/>
-              </a:srgbClr>
-            </a:solidFill>
-            <a:prstDash val="solid"/>
-          </a:ln>
-        </p:spPr>
-      </p:sp>
-      <p:sp>
-        <p:nvSpPr>
-          <p:cNvPr id="32" name="Text 27"/>
-          <p:cNvSpPr/>
-          <p:nvPr/>
-        </p:nvSpPr>
-        <p:spPr>
-          <a:xfrm>
-            <a:off x="8449056" y="5431536"/>
-            <a:ext cx="3054096" cy="384048"/>
-          </a:xfrm>
-          <a:prstGeom prst="rect">
-            <a:avLst/>
-          </a:prstGeom>
-          <a:noFill/>
-          <a:ln/>
-        </p:spPr>
-        <p:txBody>
-          <a:bodyPr wrap="square" lIns="0" tIns="0" rIns="0" bIns="0" rtlCol="0" anchor="ctr"/>
-          <a:lstStyle/>
-          <a:p>
-            <a:pPr algn="ctr" indent="0" marL="0">
-              <a:buNone/>
-            </a:pPr>
-            <a:r>
-              <a:rPr lang="en-US" sz="950" dirty="0">
-                <a:solidFill>
-                  <a:srgbClr val="5E74A0"/>
-                </a:solidFill>
-                <a:latin typeface="Microsoft JhengHei" pitchFamily="34" charset="0"/>
-                <a:ea typeface="Microsoft JhengHei" pitchFamily="34" charset="-122"/>
-                <a:cs typeface="Microsoft JhengHei" pitchFamily="34" charset="-120"/>
-              </a:rPr>
-              <a:t>適用　</a:t>
-            </a:r>
-            <a:pPr algn="ctr" indent="0" marL="0">
-              <a:buNone/>
-            </a:pPr>
-            <a:r>
-              <a:rPr lang="en-US" sz="1050" b="1" dirty="0">
-                <a:solidFill>
-                  <a:srgbClr val="E6CF9A"/>
-                </a:solidFill>
-                <a:latin typeface="Microsoft JhengHei" pitchFamily="34" charset="0"/>
-                <a:ea typeface="Microsoft JhengHei" pitchFamily="34" charset="-122"/>
-                <a:cs typeface="Microsoft JhengHei" pitchFamily="34" charset="-120"/>
-              </a:rPr>
-              <a:t>大型建案 · 多棟社區</a:t>
-            </a:r>
-            <a:endParaRPr lang="en-US" sz="950" dirty="0"/>
-          </a:p>
-        </p:txBody>
-      </p:sp>
-      <p:sp>
-        <p:nvSpPr>
-          <p:cNvPr id="33" name="Text 28"/>
-          <p:cNvSpPr/>
-          <p:nvPr/>
-        </p:nvSpPr>
-        <p:spPr>
-          <a:xfrm>
-            <a:off x="566928" y="6163056"/>
-            <a:ext cx="11064240" cy="274320"/>
-          </a:xfrm>
-          <a:prstGeom prst="rect">
-            <a:avLst/>
-          </a:prstGeom>
-          <a:noFill/>
-          <a:ln/>
-        </p:spPr>
-        <p:txBody>
-          <a:bodyPr wrap="square" lIns="0" tIns="0" rIns="0" bIns="0" rtlCol="0" anchor="ctr"/>
-          <a:lstStyle/>
-          <a:p>
-            <a:pPr indent="0" marL="0">
-              <a:buNone/>
-            </a:pPr>
-            <a:r>
-              <a:rPr lang="en-US" sz="1000" i="1" dirty="0">
-                <a:solidFill>
-                  <a:srgbClr val="5E74A0"/>
-                </a:solidFill>
-                <a:latin typeface="Microsoft JhengHei" pitchFamily="34" charset="0"/>
-                <a:ea typeface="Microsoft JhengHei" pitchFamily="34" charset="-122"/>
-                <a:cs typeface="Microsoft JhengHei" pitchFamily="34" charset="-120"/>
-              </a:rPr>
-              <a:t>※ 各級可疊加：先以體驗版驗證流程與住戶接受度，再逐棟升級標準版、擴至旗艦版；雲端與 App 用戶端全程沿用同一套系統。</a:t>
+              <a:t>※ 每階段獨立驗收,採購節奏可依銷售進度調節;P1 的機房位置與弱電管線需於建案工程期預留(與土建併行)。</a:t>
             </a:r>
             <a:endParaRPr lang="en-US" sz="1000" dirty="0"/>
           </a:p>
@@ -10229,7 +11995,7 @@
       </p:sp>
       <p:sp>
         <p:nvSpPr>
-          <p:cNvPr id="34" name="Text 29"/>
+          <p:cNvPr id="77" name="Text 75"/>
           <p:cNvSpPr/>
           <p:nvPr/>
         </p:nvSpPr>
@@ -10257,7 +12023,7 @@
                   <a:srgbClr val="5E74A0"/>
                 </a:solidFill>
               </a:rPr>
-              <a:t>推薦硬體配置清單 ── 三級部署方案</a:t>
+              <a:t>推薦硬體配置清單 ── 分階段採購建議</a:t>
             </a:r>
             <a:endParaRPr lang="en-US" sz="1050" dirty="0"/>
           </a:p>
@@ -10265,7 +12031,7 @@
       </p:sp>
       <p:sp>
         <p:nvSpPr>
-          <p:cNvPr id="35" name="Text 30"/>
+          <p:cNvPr id="78" name="Text 76"/>
           <p:cNvSpPr/>
           <p:nvPr/>
         </p:nvSpPr>
@@ -10293,7 +12059,7 @@
                   <a:srgbClr val="5E74A0"/>
                 </a:solidFill>
               </a:rPr>
-              <a:t>體驗 → 標準 → 旗艦，逐級擴充</a:t>
+              <a:t>P0 開發 → P1 基礎 → P2 智慧 → P3 旗艦</a:t>
             </a:r>
             <a:endParaRPr lang="en-US" sz="1050" dirty="0"/>
           </a:p>

--- a/docs/slides/推薦硬體配置清單.pptx
+++ b/docs/slides/推薦硬體配置清單.pptx
@@ -9653,7 +9653,7 @@
                 <a:ea typeface="Microsoft JhengHei" pitchFamily="34" charset="-122"/>
                 <a:cs typeface="Microsoft JhengHei" pitchFamily="34" charset="-120"/>
               </a:rPr>
-              <a:t>幾乎零硬體投入</a:t>
+              <a:t>最小配置:平板 ×1 + 音箱 ×1</a:t>
             </a:r>
             <a:endParaRPr lang="en-US" sz="900" dirty="0"/>
           </a:p>
